--- a/documents/backgrounds.pptx
+++ b/documents/backgrounds.pptx
@@ -1,13 +1,11 @@
 
 <file path=ppt/presentation.xml><?xml version="1.0" encoding="utf-8"?>
-<p:presentation xmlns:a="http://schemas.openxmlformats.org/drawingml/2006/main" xmlns:r="http://schemas.openxmlformats.org/officeDocument/2006/relationships" xmlns:p="http://schemas.openxmlformats.org/presentationml/2006/main" saveSubsetFonts="1" embedTrueTypeFonts="true">
+<p:presentation xmlns:a="http://schemas.openxmlformats.org/drawingml/2006/main" xmlns:r="http://schemas.openxmlformats.org/officeDocument/2006/relationships" xmlns:p="http://schemas.openxmlformats.org/presentationml/2006/main" embedTrueTypeFonts="1" saveSubsetFonts="1">
   <p:sldMasterIdLst>
     <p:sldMasterId id="2147483648" r:id="rId1"/>
   </p:sldMasterIdLst>
   <p:sldIdLst>
-    <p:sldId id="256" r:id="rId6"/>
-    <p:sldId id="257" r:id="rId7"/>
-    <p:sldId id="258" r:id="rId8"/>
+    <p:sldId id="256" r:id="rId2"/>
   </p:sldIdLst>
   <p:sldSz cx="18288000" cy="10287000"/>
   <p:notesSz cx="6858000" cy="9144000"/>
@@ -106,7 +104,98 @@
       </a:defRPr>
     </a:lvl9pPr>
   </p:defaultTextStyle>
+  <p:extLst>
+    <p:ext uri="{EFAFB233-063F-42B5-8137-9DF3F51BA10A}">
+      <p15:sldGuideLst xmlns:p15="http://schemas.microsoft.com/office/powerpoint/2012/main">
+        <p15:guide id="1" orient="horz" pos="2160">
+          <p15:clr>
+            <a:srgbClr val="A4A3A4"/>
+          </p15:clr>
+        </p15:guide>
+        <p15:guide id="2" pos="2880">
+          <p15:clr>
+            <a:srgbClr val="A4A3A4"/>
+          </p15:clr>
+        </p15:guide>
+      </p15:sldGuideLst>
+    </p:ext>
+  </p:extLst>
 </p:presentation>
+</file>
+
+<file path=ppt/revisionInfo.xml><?xml version="1.0" encoding="utf-8"?>
+<p1510:revInfo xmlns:a="http://schemas.openxmlformats.org/drawingml/2006/main" xmlns:r="http://schemas.openxmlformats.org/officeDocument/2006/relationships" xmlns:p1510="http://schemas.microsoft.com/office/powerpoint/2015/10/main">
+  <p1510:revLst>
+    <p1510:client id="{B9AE6DDD-B270-4F16-B5D9-8394463535E9}" v="211" dt="2026-04-12T11:38:03.210"/>
+  </p1510:revLst>
+</p1510:revInfo>
+</file>
+
+<file path=ppt/changesInfos/changesInfo1.xml><?xml version="1.0" encoding="utf-8"?>
+<pc:chgInfo xmlns:a="http://schemas.openxmlformats.org/drawingml/2006/main" xmlns:r="http://schemas.openxmlformats.org/officeDocument/2006/relationships" xmlns:ac="http://schemas.microsoft.com/office/drawing/2013/main/command" xmlns:pc="http://schemas.microsoft.com/office/powerpoint/2013/main/command">
+  <pc:docChgLst>
+    <pc:chgData name="Muchammad Wildan Alkautsar" userId="360672ed2ee56274" providerId="LiveId" clId="{F5771622-C242-4EFB-9359-41E4DFBD7538}"/>
+    <pc:docChg chg="custSel delSld modSld">
+      <pc:chgData name="Muchammad Wildan Alkautsar" userId="360672ed2ee56274" providerId="LiveId" clId="{F5771622-C242-4EFB-9359-41E4DFBD7538}" dt="2026-04-12T11:38:09.425" v="216" actId="2696"/>
+      <pc:docMkLst>
+        <pc:docMk/>
+      </pc:docMkLst>
+      <pc:sldChg chg="delSp mod setBg">
+        <pc:chgData name="Muchammad Wildan Alkautsar" userId="360672ed2ee56274" providerId="LiveId" clId="{F5771622-C242-4EFB-9359-41E4DFBD7538}" dt="2026-04-12T11:38:03.210" v="214"/>
+        <pc:sldMkLst>
+          <pc:docMk/>
+          <pc:sldMk cId="0" sldId="256"/>
+        </pc:sldMkLst>
+        <pc:grpChg chg="del">
+          <ac:chgData name="Muchammad Wildan Alkautsar" userId="360672ed2ee56274" providerId="LiveId" clId="{F5771622-C242-4EFB-9359-41E4DFBD7538}" dt="2026-04-12T11:37:45.836" v="0" actId="478"/>
+          <ac:grpSpMkLst>
+            <pc:docMk/>
+            <pc:sldMk cId="0" sldId="256"/>
+            <ac:grpSpMk id="2" creationId="{00000000-0000-0000-0000-000000000000}"/>
+          </ac:grpSpMkLst>
+        </pc:grpChg>
+        <pc:grpChg chg="del">
+          <ac:chgData name="Muchammad Wildan Alkautsar" userId="360672ed2ee56274" providerId="LiveId" clId="{F5771622-C242-4EFB-9359-41E4DFBD7538}" dt="2026-04-12T11:37:46.218" v="1" actId="478"/>
+          <ac:grpSpMkLst>
+            <pc:docMk/>
+            <pc:sldMk cId="0" sldId="256"/>
+            <ac:grpSpMk id="5" creationId="{00000000-0000-0000-0000-000000000000}"/>
+          </ac:grpSpMkLst>
+        </pc:grpChg>
+        <pc:grpChg chg="del">
+          <ac:chgData name="Muchammad Wildan Alkautsar" userId="360672ed2ee56274" providerId="LiveId" clId="{F5771622-C242-4EFB-9359-41E4DFBD7538}" dt="2026-04-12T11:37:47.161" v="3" actId="478"/>
+          <ac:grpSpMkLst>
+            <pc:docMk/>
+            <pc:sldMk cId="0" sldId="256"/>
+            <ac:grpSpMk id="8" creationId="{00000000-0000-0000-0000-000000000000}"/>
+          </ac:grpSpMkLst>
+        </pc:grpChg>
+        <pc:grpChg chg="del">
+          <ac:chgData name="Muchammad Wildan Alkautsar" userId="360672ed2ee56274" providerId="LiveId" clId="{F5771622-C242-4EFB-9359-41E4DFBD7538}" dt="2026-04-12T11:37:46.458" v="2" actId="478"/>
+          <ac:grpSpMkLst>
+            <pc:docMk/>
+            <pc:sldMk cId="0" sldId="256"/>
+            <ac:grpSpMk id="11" creationId="{00000000-0000-0000-0000-000000000000}"/>
+          </ac:grpSpMkLst>
+        </pc:grpChg>
+      </pc:sldChg>
+      <pc:sldChg chg="del">
+        <pc:chgData name="Muchammad Wildan Alkautsar" userId="360672ed2ee56274" providerId="LiveId" clId="{F5771622-C242-4EFB-9359-41E4DFBD7538}" dt="2026-04-12T11:38:08.091" v="215" actId="2696"/>
+        <pc:sldMkLst>
+          <pc:docMk/>
+          <pc:sldMk cId="0" sldId="257"/>
+        </pc:sldMkLst>
+      </pc:sldChg>
+      <pc:sldChg chg="del">
+        <pc:chgData name="Muchammad Wildan Alkautsar" userId="360672ed2ee56274" providerId="LiveId" clId="{F5771622-C242-4EFB-9359-41E4DFBD7538}" dt="2026-04-12T11:38:09.425" v="216" actId="2696"/>
+        <pc:sldMkLst>
+          <pc:docMk/>
+          <pc:sldMk cId="0" sldId="258"/>
+        </pc:sldMkLst>
+      </pc:sldChg>
+    </pc:docChg>
+  </pc:docChgLst>
+</pc:chgInfo>
 </file>
 
 <file path=ppt/slideLayouts/slideLayout1.xml><?xml version="1.0" encoding="utf-8"?>
@@ -147,10 +236,9 @@
           <a:lstStyle/>
           <a:p>
             <a:r>
-              <a:rPr lang="en-US" smtClean="0"/>
+              <a:rPr lang="en-US"/>
               <a:t>Click to edit Master title style</a:t>
             </a:r>
-            <a:endParaRPr lang="en-US"/>
           </a:p>
         </p:txBody>
       </p:sp>
@@ -266,10 +354,9 @@
           </a:lstStyle>
           <a:p>
             <a:r>
-              <a:rPr lang="en-US" smtClean="0"/>
+              <a:rPr lang="en-US"/>
               <a:t>Click to edit Master subtitle style</a:t>
             </a:r>
-            <a:endParaRPr lang="en-US"/>
           </a:p>
         </p:txBody>
       </p:sp>
@@ -291,7 +378,7 @@
             <a:fld id="{1D8BD707-D9CF-40AE-B4C6-C98DA3205C09}" type="datetimeFigureOut">
               <a:rPr lang="en-US" smtClean="0"/>
               <a:pPr/>
-              <a:t>8/1/2011</a:t>
+              <a:t>4/12/2026</a:t>
             </a:fld>
             <a:endParaRPr lang="en-US"/>
           </a:p>
@@ -381,10 +468,9 @@
           <a:lstStyle/>
           <a:p>
             <a:r>
-              <a:rPr lang="en-US" smtClean="0"/>
+              <a:rPr lang="en-US"/>
               <a:t>Click to edit Master title style</a:t>
             </a:r>
-            <a:endParaRPr lang="en-US"/>
           </a:p>
         </p:txBody>
       </p:sp>
@@ -405,38 +491,37 @@
           <a:p>
             <a:pPr lvl="0"/>
             <a:r>
-              <a:rPr lang="en-US" smtClean="0"/>
+              <a:rPr lang="en-US"/>
               <a:t>Click to edit Master text styles</a:t>
             </a:r>
           </a:p>
           <a:p>
             <a:pPr lvl="1"/>
             <a:r>
-              <a:rPr lang="en-US" smtClean="0"/>
+              <a:rPr lang="en-US"/>
               <a:t>Second level</a:t>
             </a:r>
           </a:p>
           <a:p>
             <a:pPr lvl="2"/>
             <a:r>
-              <a:rPr lang="en-US" smtClean="0"/>
+              <a:rPr lang="en-US"/>
               <a:t>Third level</a:t>
             </a:r>
           </a:p>
           <a:p>
             <a:pPr lvl="3"/>
             <a:r>
-              <a:rPr lang="en-US" smtClean="0"/>
+              <a:rPr lang="en-US"/>
               <a:t>Fourth level</a:t>
             </a:r>
           </a:p>
           <a:p>
             <a:pPr lvl="4"/>
             <a:r>
-              <a:rPr lang="en-US" smtClean="0"/>
+              <a:rPr lang="en-US"/>
               <a:t>Fifth level</a:t>
             </a:r>
-            <a:endParaRPr lang="en-US"/>
           </a:p>
         </p:txBody>
       </p:sp>
@@ -458,7 +543,7 @@
             <a:fld id="{1D8BD707-D9CF-40AE-B4C6-C98DA3205C09}" type="datetimeFigureOut">
               <a:rPr lang="en-US" smtClean="0"/>
               <a:pPr/>
-              <a:t>8/1/2011</a:t>
+              <a:t>4/12/2026</a:t>
             </a:fld>
             <a:endParaRPr lang="en-US"/>
           </a:p>
@@ -553,10 +638,9 @@
           <a:lstStyle/>
           <a:p>
             <a:r>
-              <a:rPr lang="en-US" smtClean="0"/>
+              <a:rPr lang="en-US"/>
               <a:t>Click to edit Master title style</a:t>
             </a:r>
-            <a:endParaRPr lang="en-US"/>
           </a:p>
         </p:txBody>
       </p:sp>
@@ -582,38 +666,37 @@
           <a:p>
             <a:pPr lvl="0"/>
             <a:r>
-              <a:rPr lang="en-US" smtClean="0"/>
+              <a:rPr lang="en-US"/>
               <a:t>Click to edit Master text styles</a:t>
             </a:r>
           </a:p>
           <a:p>
             <a:pPr lvl="1"/>
             <a:r>
-              <a:rPr lang="en-US" smtClean="0"/>
+              <a:rPr lang="en-US"/>
               <a:t>Second level</a:t>
             </a:r>
           </a:p>
           <a:p>
             <a:pPr lvl="2"/>
             <a:r>
-              <a:rPr lang="en-US" smtClean="0"/>
+              <a:rPr lang="en-US"/>
               <a:t>Third level</a:t>
             </a:r>
           </a:p>
           <a:p>
             <a:pPr lvl="3"/>
             <a:r>
-              <a:rPr lang="en-US" smtClean="0"/>
+              <a:rPr lang="en-US"/>
               <a:t>Fourth level</a:t>
             </a:r>
           </a:p>
           <a:p>
             <a:pPr lvl="4"/>
             <a:r>
-              <a:rPr lang="en-US" smtClean="0"/>
+              <a:rPr lang="en-US"/>
               <a:t>Fifth level</a:t>
             </a:r>
-            <a:endParaRPr lang="en-US"/>
           </a:p>
         </p:txBody>
       </p:sp>
@@ -635,7 +718,7 @@
             <a:fld id="{1D8BD707-D9CF-40AE-B4C6-C98DA3205C09}" type="datetimeFigureOut">
               <a:rPr lang="en-US" smtClean="0"/>
               <a:pPr/>
-              <a:t>8/1/2011</a:t>
+              <a:t>4/12/2026</a:t>
             </a:fld>
             <a:endParaRPr lang="en-US"/>
           </a:p>
@@ -725,10 +808,9 @@
           <a:lstStyle/>
           <a:p>
             <a:r>
-              <a:rPr lang="en-US" smtClean="0"/>
+              <a:rPr lang="en-US"/>
               <a:t>Click to edit Master title style</a:t>
             </a:r>
-            <a:endParaRPr lang="en-US"/>
           </a:p>
         </p:txBody>
       </p:sp>
@@ -749,38 +831,37 @@
           <a:p>
             <a:pPr lvl="0"/>
             <a:r>
-              <a:rPr lang="en-US" smtClean="0"/>
+              <a:rPr lang="en-US"/>
               <a:t>Click to edit Master text styles</a:t>
             </a:r>
           </a:p>
           <a:p>
             <a:pPr lvl="1"/>
             <a:r>
-              <a:rPr lang="en-US" smtClean="0"/>
+              <a:rPr lang="en-US"/>
               <a:t>Second level</a:t>
             </a:r>
           </a:p>
           <a:p>
             <a:pPr lvl="2"/>
             <a:r>
-              <a:rPr lang="en-US" smtClean="0"/>
+              <a:rPr lang="en-US"/>
               <a:t>Third level</a:t>
             </a:r>
           </a:p>
           <a:p>
             <a:pPr lvl="3"/>
             <a:r>
-              <a:rPr lang="en-US" smtClean="0"/>
+              <a:rPr lang="en-US"/>
               <a:t>Fourth level</a:t>
             </a:r>
           </a:p>
           <a:p>
             <a:pPr lvl="4"/>
             <a:r>
-              <a:rPr lang="en-US" smtClean="0"/>
+              <a:rPr lang="en-US"/>
               <a:t>Fifth level</a:t>
             </a:r>
-            <a:endParaRPr lang="en-US"/>
           </a:p>
         </p:txBody>
       </p:sp>
@@ -802,7 +883,7 @@
             <a:fld id="{1D8BD707-D9CF-40AE-B4C6-C98DA3205C09}" type="datetimeFigureOut">
               <a:rPr lang="en-US" smtClean="0"/>
               <a:pPr/>
-              <a:t>8/1/2011</a:t>
+              <a:t>4/12/2026</a:t>
             </a:fld>
             <a:endParaRPr lang="en-US"/>
           </a:p>
@@ -901,10 +982,9 @@
           </a:lstStyle>
           <a:p>
             <a:r>
-              <a:rPr lang="en-US" smtClean="0"/>
+              <a:rPr lang="en-US"/>
               <a:t>Click to edit Master title style</a:t>
             </a:r>
-            <a:endParaRPr lang="en-US"/>
           </a:p>
         </p:txBody>
       </p:sp>
@@ -1021,7 +1101,7 @@
           <a:p>
             <a:pPr lvl="0"/>
             <a:r>
-              <a:rPr lang="en-US" smtClean="0"/>
+              <a:rPr lang="en-US"/>
               <a:t>Click to edit Master text styles</a:t>
             </a:r>
           </a:p>
@@ -1045,7 +1125,7 @@
             <a:fld id="{1D8BD707-D9CF-40AE-B4C6-C98DA3205C09}" type="datetimeFigureOut">
               <a:rPr lang="en-US" smtClean="0"/>
               <a:pPr/>
-              <a:t>8/1/2011</a:t>
+              <a:t>4/12/2026</a:t>
             </a:fld>
             <a:endParaRPr lang="en-US"/>
           </a:p>
@@ -1135,10 +1215,9 @@
           <a:lstStyle/>
           <a:p>
             <a:r>
-              <a:rPr lang="en-US" smtClean="0"/>
+              <a:rPr lang="en-US"/>
               <a:t>Click to edit Master title style</a:t>
             </a:r>
-            <a:endParaRPr lang="en-US"/>
           </a:p>
         </p:txBody>
       </p:sp>
@@ -1192,38 +1271,37 @@
           <a:p>
             <a:pPr lvl="0"/>
             <a:r>
-              <a:rPr lang="en-US" smtClean="0"/>
+              <a:rPr lang="en-US"/>
               <a:t>Click to edit Master text styles</a:t>
             </a:r>
           </a:p>
           <a:p>
             <a:pPr lvl="1"/>
             <a:r>
-              <a:rPr lang="en-US" smtClean="0"/>
+              <a:rPr lang="en-US"/>
               <a:t>Second level</a:t>
             </a:r>
           </a:p>
           <a:p>
             <a:pPr lvl="2"/>
             <a:r>
-              <a:rPr lang="en-US" smtClean="0"/>
+              <a:rPr lang="en-US"/>
               <a:t>Third level</a:t>
             </a:r>
           </a:p>
           <a:p>
             <a:pPr lvl="3"/>
             <a:r>
-              <a:rPr lang="en-US" smtClean="0"/>
+              <a:rPr lang="en-US"/>
               <a:t>Fourth level</a:t>
             </a:r>
           </a:p>
           <a:p>
             <a:pPr lvl="4"/>
             <a:r>
-              <a:rPr lang="en-US" smtClean="0"/>
+              <a:rPr lang="en-US"/>
               <a:t>Fifth level</a:t>
             </a:r>
-            <a:endParaRPr lang="en-US"/>
           </a:p>
         </p:txBody>
       </p:sp>
@@ -1277,38 +1355,37 @@
           <a:p>
             <a:pPr lvl="0"/>
             <a:r>
-              <a:rPr lang="en-US" smtClean="0"/>
+              <a:rPr lang="en-US"/>
               <a:t>Click to edit Master text styles</a:t>
             </a:r>
           </a:p>
           <a:p>
             <a:pPr lvl="1"/>
             <a:r>
-              <a:rPr lang="en-US" smtClean="0"/>
+              <a:rPr lang="en-US"/>
               <a:t>Second level</a:t>
             </a:r>
           </a:p>
           <a:p>
             <a:pPr lvl="2"/>
             <a:r>
-              <a:rPr lang="en-US" smtClean="0"/>
+              <a:rPr lang="en-US"/>
               <a:t>Third level</a:t>
             </a:r>
           </a:p>
           <a:p>
             <a:pPr lvl="3"/>
             <a:r>
-              <a:rPr lang="en-US" smtClean="0"/>
+              <a:rPr lang="en-US"/>
               <a:t>Fourth level</a:t>
             </a:r>
           </a:p>
           <a:p>
             <a:pPr lvl="4"/>
             <a:r>
-              <a:rPr lang="en-US" smtClean="0"/>
+              <a:rPr lang="en-US"/>
               <a:t>Fifth level</a:t>
             </a:r>
-            <a:endParaRPr lang="en-US"/>
           </a:p>
         </p:txBody>
       </p:sp>
@@ -1330,7 +1407,7 @@
             <a:fld id="{1D8BD707-D9CF-40AE-B4C6-C98DA3205C09}" type="datetimeFigureOut">
               <a:rPr lang="en-US" smtClean="0"/>
               <a:pPr/>
-              <a:t>8/1/2011</a:t>
+              <a:t>4/12/2026</a:t>
             </a:fld>
             <a:endParaRPr lang="en-US"/>
           </a:p>
@@ -1424,10 +1501,9 @@
           </a:lstStyle>
           <a:p>
             <a:r>
-              <a:rPr lang="en-US" smtClean="0"/>
+              <a:rPr lang="en-US"/>
               <a:t>Click to edit Master title style</a:t>
             </a:r>
-            <a:endParaRPr lang="en-US"/>
           </a:p>
         </p:txBody>
       </p:sp>
@@ -1490,7 +1566,7 @@
           <a:p>
             <a:pPr lvl="0"/>
             <a:r>
-              <a:rPr lang="en-US" smtClean="0"/>
+              <a:rPr lang="en-US"/>
               <a:t>Click to edit Master text styles</a:t>
             </a:r>
           </a:p>
@@ -1546,38 +1622,37 @@
           <a:p>
             <a:pPr lvl="0"/>
             <a:r>
-              <a:rPr lang="en-US" smtClean="0"/>
+              <a:rPr lang="en-US"/>
               <a:t>Click to edit Master text styles</a:t>
             </a:r>
           </a:p>
           <a:p>
             <a:pPr lvl="1"/>
             <a:r>
-              <a:rPr lang="en-US" smtClean="0"/>
+              <a:rPr lang="en-US"/>
               <a:t>Second level</a:t>
             </a:r>
           </a:p>
           <a:p>
             <a:pPr lvl="2"/>
             <a:r>
-              <a:rPr lang="en-US" smtClean="0"/>
+              <a:rPr lang="en-US"/>
               <a:t>Third level</a:t>
             </a:r>
           </a:p>
           <a:p>
             <a:pPr lvl="3"/>
             <a:r>
-              <a:rPr lang="en-US" smtClean="0"/>
+              <a:rPr lang="en-US"/>
               <a:t>Fourth level</a:t>
             </a:r>
           </a:p>
           <a:p>
             <a:pPr lvl="4"/>
             <a:r>
-              <a:rPr lang="en-US" smtClean="0"/>
+              <a:rPr lang="en-US"/>
               <a:t>Fifth level</a:t>
             </a:r>
-            <a:endParaRPr lang="en-US"/>
           </a:p>
         </p:txBody>
       </p:sp>
@@ -1640,7 +1715,7 @@
           <a:p>
             <a:pPr lvl="0"/>
             <a:r>
-              <a:rPr lang="en-US" smtClean="0"/>
+              <a:rPr lang="en-US"/>
               <a:t>Click to edit Master text styles</a:t>
             </a:r>
           </a:p>
@@ -1696,38 +1771,37 @@
           <a:p>
             <a:pPr lvl="0"/>
             <a:r>
-              <a:rPr lang="en-US" smtClean="0"/>
+              <a:rPr lang="en-US"/>
               <a:t>Click to edit Master text styles</a:t>
             </a:r>
           </a:p>
           <a:p>
             <a:pPr lvl="1"/>
             <a:r>
-              <a:rPr lang="en-US" smtClean="0"/>
+              <a:rPr lang="en-US"/>
               <a:t>Second level</a:t>
             </a:r>
           </a:p>
           <a:p>
             <a:pPr lvl="2"/>
             <a:r>
-              <a:rPr lang="en-US" smtClean="0"/>
+              <a:rPr lang="en-US"/>
               <a:t>Third level</a:t>
             </a:r>
           </a:p>
           <a:p>
             <a:pPr lvl="3"/>
             <a:r>
-              <a:rPr lang="en-US" smtClean="0"/>
+              <a:rPr lang="en-US"/>
               <a:t>Fourth level</a:t>
             </a:r>
           </a:p>
           <a:p>
             <a:pPr lvl="4"/>
             <a:r>
-              <a:rPr lang="en-US" smtClean="0"/>
+              <a:rPr lang="en-US"/>
               <a:t>Fifth level</a:t>
             </a:r>
-            <a:endParaRPr lang="en-US"/>
           </a:p>
         </p:txBody>
       </p:sp>
@@ -1749,7 +1823,7 @@
             <a:fld id="{1D8BD707-D9CF-40AE-B4C6-C98DA3205C09}" type="datetimeFigureOut">
               <a:rPr lang="en-US" smtClean="0"/>
               <a:pPr/>
-              <a:t>8/1/2011</a:t>
+              <a:t>4/12/2026</a:t>
             </a:fld>
             <a:endParaRPr lang="en-US"/>
           </a:p>
@@ -1839,10 +1913,9 @@
           <a:lstStyle/>
           <a:p>
             <a:r>
-              <a:rPr lang="en-US" smtClean="0"/>
+              <a:rPr lang="en-US"/>
               <a:t>Click to edit Master title style</a:t>
             </a:r>
-            <a:endParaRPr lang="en-US"/>
           </a:p>
         </p:txBody>
       </p:sp>
@@ -1864,7 +1937,7 @@
             <a:fld id="{1D8BD707-D9CF-40AE-B4C6-C98DA3205C09}" type="datetimeFigureOut">
               <a:rPr lang="en-US" smtClean="0"/>
               <a:pPr/>
-              <a:t>8/1/2011</a:t>
+              <a:t>4/12/2026</a:t>
             </a:fld>
             <a:endParaRPr lang="en-US"/>
           </a:p>
@@ -1956,7 +2029,7 @@
             <a:fld id="{1D8BD707-D9CF-40AE-B4C6-C98DA3205C09}" type="datetimeFigureOut">
               <a:rPr lang="en-US" smtClean="0"/>
               <a:pPr/>
-              <a:t>8/1/2011</a:t>
+              <a:t>4/12/2026</a:t>
             </a:fld>
             <a:endParaRPr lang="en-US"/>
           </a:p>
@@ -2055,10 +2128,9 @@
           </a:lstStyle>
           <a:p>
             <a:r>
-              <a:rPr lang="en-US" smtClean="0"/>
+              <a:rPr lang="en-US"/>
               <a:t>Click to edit Master title style</a:t>
             </a:r>
-            <a:endParaRPr lang="en-US"/>
           </a:p>
         </p:txBody>
       </p:sp>
@@ -2112,38 +2184,37 @@
           <a:p>
             <a:pPr lvl="0"/>
             <a:r>
-              <a:rPr lang="en-US" smtClean="0"/>
+              <a:rPr lang="en-US"/>
               <a:t>Click to edit Master text styles</a:t>
             </a:r>
           </a:p>
           <a:p>
             <a:pPr lvl="1"/>
             <a:r>
-              <a:rPr lang="en-US" smtClean="0"/>
+              <a:rPr lang="en-US"/>
               <a:t>Second level</a:t>
             </a:r>
           </a:p>
           <a:p>
             <a:pPr lvl="2"/>
             <a:r>
-              <a:rPr lang="en-US" smtClean="0"/>
+              <a:rPr lang="en-US"/>
               <a:t>Third level</a:t>
             </a:r>
           </a:p>
           <a:p>
             <a:pPr lvl="3"/>
             <a:r>
-              <a:rPr lang="en-US" smtClean="0"/>
+              <a:rPr lang="en-US"/>
               <a:t>Fourth level</a:t>
             </a:r>
           </a:p>
           <a:p>
             <a:pPr lvl="4"/>
             <a:r>
-              <a:rPr lang="en-US" smtClean="0"/>
+              <a:rPr lang="en-US"/>
               <a:t>Fifth level</a:t>
             </a:r>
-            <a:endParaRPr lang="en-US"/>
           </a:p>
         </p:txBody>
       </p:sp>
@@ -2206,7 +2277,7 @@
           <a:p>
             <a:pPr lvl="0"/>
             <a:r>
-              <a:rPr lang="en-US" smtClean="0"/>
+              <a:rPr lang="en-US"/>
               <a:t>Click to edit Master text styles</a:t>
             </a:r>
           </a:p>
@@ -2230,7 +2301,7 @@
             <a:fld id="{1D8BD707-D9CF-40AE-B4C6-C98DA3205C09}" type="datetimeFigureOut">
               <a:rPr lang="en-US" smtClean="0"/>
               <a:pPr/>
-              <a:t>8/1/2011</a:t>
+              <a:t>4/12/2026</a:t>
             </a:fld>
             <a:endParaRPr lang="en-US"/>
           </a:p>
@@ -2329,10 +2400,9 @@
           </a:lstStyle>
           <a:p>
             <a:r>
-              <a:rPr lang="en-US" smtClean="0"/>
+              <a:rPr lang="en-US"/>
               <a:t>Click to edit Master title style</a:t>
             </a:r>
-            <a:endParaRPr lang="en-US"/>
           </a:p>
         </p:txBody>
       </p:sp>
@@ -2456,7 +2526,7 @@
           <a:p>
             <a:pPr lvl="0"/>
             <a:r>
-              <a:rPr lang="en-US" smtClean="0"/>
+              <a:rPr lang="en-US"/>
               <a:t>Click to edit Master text styles</a:t>
             </a:r>
           </a:p>
@@ -2480,7 +2550,7 @@
             <a:fld id="{1D8BD707-D9CF-40AE-B4C6-C98DA3205C09}" type="datetimeFigureOut">
               <a:rPr lang="en-US" smtClean="0"/>
               <a:pPr/>
-              <a:t>8/1/2011</a:t>
+              <a:t>4/12/2026</a:t>
             </a:fld>
             <a:endParaRPr lang="en-US"/>
           </a:p>
@@ -2585,10 +2655,9 @@
           <a:lstStyle/>
           <a:p>
             <a:r>
-              <a:rPr lang="en-US" smtClean="0"/>
+              <a:rPr lang="en-US"/>
               <a:t>Click to edit Master title style</a:t>
             </a:r>
-            <a:endParaRPr lang="en-US"/>
           </a:p>
         </p:txBody>
       </p:sp>
@@ -2619,38 +2688,37 @@
           <a:p>
             <a:pPr lvl="0"/>
             <a:r>
-              <a:rPr lang="en-US" smtClean="0"/>
+              <a:rPr lang="en-US"/>
               <a:t>Click to edit Master text styles</a:t>
             </a:r>
           </a:p>
           <a:p>
             <a:pPr lvl="1"/>
             <a:r>
-              <a:rPr lang="en-US" smtClean="0"/>
+              <a:rPr lang="en-US"/>
               <a:t>Second level</a:t>
             </a:r>
           </a:p>
           <a:p>
             <a:pPr lvl="2"/>
             <a:r>
-              <a:rPr lang="en-US" smtClean="0"/>
+              <a:rPr lang="en-US"/>
               <a:t>Third level</a:t>
             </a:r>
           </a:p>
           <a:p>
             <a:pPr lvl="3"/>
             <a:r>
-              <a:rPr lang="en-US" smtClean="0"/>
+              <a:rPr lang="en-US"/>
               <a:t>Fourth level</a:t>
             </a:r>
           </a:p>
           <a:p>
             <a:pPr lvl="4"/>
             <a:r>
-              <a:rPr lang="en-US" smtClean="0"/>
+              <a:rPr lang="en-US"/>
               <a:t>Fifth level</a:t>
             </a:r>
-            <a:endParaRPr lang="en-US"/>
           </a:p>
         </p:txBody>
       </p:sp>
@@ -2690,7 +2758,7 @@
             <a:fld id="{1D8BD707-D9CF-40AE-B4C6-C98DA3205C09}" type="datetimeFigureOut">
               <a:rPr lang="en-US" smtClean="0"/>
               <a:pPr/>
-              <a:t>8/1/2011</a:t>
+              <a:t>4/12/2026</a:t>
             </a:fld>
             <a:endParaRPr lang="en-US"/>
           </a:p>
@@ -3045,23 +3113,23 @@
 </file>
 
 <file path=ppt/slides/slide1.xml><?xml version="1.0" encoding="utf-8"?>
-<p:sld xmlns:p="http://schemas.openxmlformats.org/presentationml/2006/main" xmlns:a="http://schemas.openxmlformats.org/drawingml/2006/main">
+<p:sld xmlns:a="http://schemas.openxmlformats.org/drawingml/2006/main" xmlns:r="http://schemas.openxmlformats.org/officeDocument/2006/relationships" xmlns:p="http://schemas.openxmlformats.org/presentationml/2006/main">
   <p:cSld>
     <p:bg>
       <p:bgPr>
-        <a:gradFill rotWithShape="true">
+        <a:gradFill rotWithShape="1">
           <a:gsLst>
             <a:gs pos="0">
               <a:srgbClr val="FFFFFF">
                 <a:alpha val="100000"/>
               </a:srgbClr>
             </a:gs>
-            <a:gs pos="50000">
+            <a:gs pos="100000">
               <a:srgbClr val="68C9FF">
                 <a:alpha val="100000"/>
               </a:srgbClr>
             </a:gs>
-            <a:gs pos="100000">
+            <a:gs pos="0">
               <a:srgbClr val="000000">
                 <a:alpha val="100000"/>
               </a:srgbClr>
@@ -3069,6 +3137,7 @@
           </a:gsLst>
           <a:lin ang="0"/>
         </a:gradFill>
+        <a:effectLst/>
       </p:bgPr>
     </p:bg>
     <p:spTree>
@@ -3085,1879 +3154,6 @@
           <a:chExt cx="0" cy="0"/>
         </a:xfrm>
       </p:grpSpPr>
-      <p:grpSp>
-        <p:nvGrpSpPr>
-          <p:cNvPr name="Group 2" id="2"/>
-          <p:cNvGrpSpPr/>
-          <p:nvPr/>
-        </p:nvGrpSpPr>
-        <p:grpSpPr>
-          <a:xfrm rot="0">
-            <a:off x="0" y="0"/>
-            <a:ext cx="3619056" cy="1028700"/>
-            <a:chOff x="0" y="0"/>
-            <a:chExt cx="953167" cy="270878"/>
-          </a:xfrm>
-        </p:grpSpPr>
-        <p:sp>
-          <p:nvSpPr>
-            <p:cNvPr name="Freeform 3" id="3"/>
-            <p:cNvSpPr/>
-            <p:nvPr/>
-          </p:nvSpPr>
-          <p:spPr>
-            <a:xfrm flipH="false" flipV="false" rot="0">
-              <a:off x="0" y="0"/>
-              <a:ext cx="953167" cy="270878"/>
-            </a:xfrm>
-            <a:custGeom>
-              <a:avLst/>
-              <a:gdLst/>
-              <a:ahLst/>
-              <a:cxnLst/>
-              <a:rect r="r" b="b" t="t" l="l"/>
-              <a:pathLst>
-                <a:path h="270878" w="953167">
-                  <a:moveTo>
-                    <a:pt x="953167" y="51341"/>
-                  </a:moveTo>
-                  <a:lnTo>
-                    <a:pt x="953167" y="219537"/>
-                  </a:lnTo>
-                  <a:cubicBezTo>
-                    <a:pt x="953167" y="233153"/>
-                    <a:pt x="947758" y="246212"/>
-                    <a:pt x="938130" y="255840"/>
-                  </a:cubicBezTo>
-                  <a:cubicBezTo>
-                    <a:pt x="928501" y="265468"/>
-                    <a:pt x="915442" y="270878"/>
-                    <a:pt x="901826" y="270878"/>
-                  </a:cubicBezTo>
-                  <a:lnTo>
-                    <a:pt x="51341" y="270878"/>
-                  </a:lnTo>
-                  <a:cubicBezTo>
-                    <a:pt x="37725" y="270878"/>
-                    <a:pt x="24666" y="265468"/>
-                    <a:pt x="15037" y="255840"/>
-                  </a:cubicBezTo>
-                  <a:cubicBezTo>
-                    <a:pt x="5409" y="246212"/>
-                    <a:pt x="0" y="233153"/>
-                    <a:pt x="0" y="219537"/>
-                  </a:cubicBezTo>
-                  <a:lnTo>
-                    <a:pt x="0" y="51341"/>
-                  </a:lnTo>
-                  <a:cubicBezTo>
-                    <a:pt x="0" y="37725"/>
-                    <a:pt x="5409" y="24666"/>
-                    <a:pt x="15037" y="15037"/>
-                  </a:cubicBezTo>
-                  <a:cubicBezTo>
-                    <a:pt x="24666" y="5409"/>
-                    <a:pt x="37725" y="0"/>
-                    <a:pt x="51341" y="0"/>
-                  </a:cubicBezTo>
-                  <a:lnTo>
-                    <a:pt x="901826" y="0"/>
-                  </a:lnTo>
-                  <a:cubicBezTo>
-                    <a:pt x="915442" y="0"/>
-                    <a:pt x="928501" y="5409"/>
-                    <a:pt x="938130" y="15037"/>
-                  </a:cubicBezTo>
-                  <a:cubicBezTo>
-                    <a:pt x="947758" y="24666"/>
-                    <a:pt x="953167" y="37725"/>
-                    <a:pt x="953167" y="51341"/>
-                  </a:cubicBezTo>
-                  <a:close/>
-                </a:path>
-              </a:pathLst>
-            </a:custGeom>
-            <a:solidFill>
-              <a:srgbClr val="545454"/>
-            </a:solidFill>
-          </p:spPr>
-        </p:sp>
-        <p:sp>
-          <p:nvSpPr>
-            <p:cNvPr name="TextBox 4" id="4"/>
-            <p:cNvSpPr txBox="true"/>
-            <p:nvPr/>
-          </p:nvSpPr>
-          <p:spPr>
-            <a:xfrm>
-              <a:off x="0" y="-47625"/>
-              <a:ext cx="953167" cy="318503"/>
-            </a:xfrm>
-            <a:prstGeom prst="rect">
-              <a:avLst/>
-            </a:prstGeom>
-          </p:spPr>
-          <p:txBody>
-            <a:bodyPr anchor="ctr" rtlCol="false" tIns="50800" lIns="50800" bIns="50800" rIns="50800"/>
-            <a:lstStyle/>
-            <a:p>
-              <a:pPr algn="ctr">
-                <a:lnSpc>
-                  <a:spcPts val="2659"/>
-                </a:lnSpc>
-              </a:pPr>
-            </a:p>
-          </p:txBody>
-        </p:sp>
-      </p:grpSp>
-      <p:grpSp>
-        <p:nvGrpSpPr>
-          <p:cNvPr name="Group 5" id="5"/>
-          <p:cNvGrpSpPr/>
-          <p:nvPr/>
-        </p:nvGrpSpPr>
-        <p:grpSpPr>
-          <a:xfrm rot="0">
-            <a:off x="0" y="1185218"/>
-            <a:ext cx="3619056" cy="5904189"/>
-            <a:chOff x="0" y="0"/>
-            <a:chExt cx="953167" cy="1554693"/>
-          </a:xfrm>
-        </p:grpSpPr>
-        <p:sp>
-          <p:nvSpPr>
-            <p:cNvPr name="Freeform 6" id="6"/>
-            <p:cNvSpPr/>
-            <p:nvPr/>
-          </p:nvSpPr>
-          <p:spPr>
-            <a:xfrm flipH="false" flipV="false" rot="0">
-              <a:off x="0" y="0"/>
-              <a:ext cx="953167" cy="1554693"/>
-            </a:xfrm>
-            <a:custGeom>
-              <a:avLst/>
-              <a:gdLst/>
-              <a:ahLst/>
-              <a:cxnLst/>
-              <a:rect r="r" b="b" t="t" l="l"/>
-              <a:pathLst>
-                <a:path h="1554693" w="953167">
-                  <a:moveTo>
-                    <a:pt x="953167" y="51341"/>
-                  </a:moveTo>
-                  <a:lnTo>
-                    <a:pt x="953167" y="1503352"/>
-                  </a:lnTo>
-                  <a:cubicBezTo>
-                    <a:pt x="953167" y="1516968"/>
-                    <a:pt x="947758" y="1530027"/>
-                    <a:pt x="938130" y="1539655"/>
-                  </a:cubicBezTo>
-                  <a:cubicBezTo>
-                    <a:pt x="928501" y="1549284"/>
-                    <a:pt x="915442" y="1554693"/>
-                    <a:pt x="901826" y="1554693"/>
-                  </a:cubicBezTo>
-                  <a:lnTo>
-                    <a:pt x="51341" y="1554693"/>
-                  </a:lnTo>
-                  <a:cubicBezTo>
-                    <a:pt x="37725" y="1554693"/>
-                    <a:pt x="24666" y="1549284"/>
-                    <a:pt x="15037" y="1539655"/>
-                  </a:cubicBezTo>
-                  <a:cubicBezTo>
-                    <a:pt x="5409" y="1530027"/>
-                    <a:pt x="0" y="1516968"/>
-                    <a:pt x="0" y="1503352"/>
-                  </a:cubicBezTo>
-                  <a:lnTo>
-                    <a:pt x="0" y="51341"/>
-                  </a:lnTo>
-                  <a:cubicBezTo>
-                    <a:pt x="0" y="37725"/>
-                    <a:pt x="5409" y="24666"/>
-                    <a:pt x="15037" y="15037"/>
-                  </a:cubicBezTo>
-                  <a:cubicBezTo>
-                    <a:pt x="24666" y="5409"/>
-                    <a:pt x="37725" y="0"/>
-                    <a:pt x="51341" y="0"/>
-                  </a:cubicBezTo>
-                  <a:lnTo>
-                    <a:pt x="901826" y="0"/>
-                  </a:lnTo>
-                  <a:cubicBezTo>
-                    <a:pt x="915442" y="0"/>
-                    <a:pt x="928501" y="5409"/>
-                    <a:pt x="938130" y="15037"/>
-                  </a:cubicBezTo>
-                  <a:cubicBezTo>
-                    <a:pt x="947758" y="24666"/>
-                    <a:pt x="953167" y="37725"/>
-                    <a:pt x="953167" y="51341"/>
-                  </a:cubicBezTo>
-                  <a:close/>
-                </a:path>
-              </a:pathLst>
-            </a:custGeom>
-            <a:solidFill>
-              <a:srgbClr val="545454"/>
-            </a:solidFill>
-          </p:spPr>
-        </p:sp>
-        <p:sp>
-          <p:nvSpPr>
-            <p:cNvPr name="TextBox 7" id="7"/>
-            <p:cNvSpPr txBox="true"/>
-            <p:nvPr/>
-          </p:nvSpPr>
-          <p:spPr>
-            <a:xfrm>
-              <a:off x="0" y="-47625"/>
-              <a:ext cx="953167" cy="1602318"/>
-            </a:xfrm>
-            <a:prstGeom prst="rect">
-              <a:avLst/>
-            </a:prstGeom>
-          </p:spPr>
-          <p:txBody>
-            <a:bodyPr anchor="ctr" rtlCol="false" tIns="50800" lIns="50800" bIns="50800" rIns="50800"/>
-            <a:lstStyle/>
-            <a:p>
-              <a:pPr algn="ctr">
-                <a:lnSpc>
-                  <a:spcPts val="2659"/>
-                </a:lnSpc>
-              </a:pPr>
-            </a:p>
-          </p:txBody>
-        </p:sp>
-      </p:grpSp>
-      <p:grpSp>
-        <p:nvGrpSpPr>
-          <p:cNvPr name="Group 8" id="8"/>
-          <p:cNvGrpSpPr/>
-          <p:nvPr/>
-        </p:nvGrpSpPr>
-        <p:grpSpPr>
-          <a:xfrm rot="0">
-            <a:off x="0" y="7241807"/>
-            <a:ext cx="18288000" cy="3045193"/>
-            <a:chOff x="0" y="0"/>
-            <a:chExt cx="4816593" cy="801861"/>
-          </a:xfrm>
-        </p:grpSpPr>
-        <p:sp>
-          <p:nvSpPr>
-            <p:cNvPr name="Freeform 9" id="9"/>
-            <p:cNvSpPr/>
-            <p:nvPr/>
-          </p:nvSpPr>
-          <p:spPr>
-            <a:xfrm flipH="false" flipV="false" rot="0">
-              <a:off x="0" y="0"/>
-              <a:ext cx="4816592" cy="801861"/>
-            </a:xfrm>
-            <a:custGeom>
-              <a:avLst/>
-              <a:gdLst/>
-              <a:ahLst/>
-              <a:cxnLst/>
-              <a:rect r="r" b="b" t="t" l="l"/>
-              <a:pathLst>
-                <a:path h="801861" w="4816592">
-                  <a:moveTo>
-                    <a:pt x="4816592" y="10160"/>
-                  </a:moveTo>
-                  <a:lnTo>
-                    <a:pt x="4816592" y="791701"/>
-                  </a:lnTo>
-                  <a:cubicBezTo>
-                    <a:pt x="4816592" y="797312"/>
-                    <a:pt x="4812043" y="801861"/>
-                    <a:pt x="4806433" y="801861"/>
-                  </a:cubicBezTo>
-                  <a:lnTo>
-                    <a:pt x="10160" y="801861"/>
-                  </a:lnTo>
-                  <a:cubicBezTo>
-                    <a:pt x="4549" y="801861"/>
-                    <a:pt x="0" y="797312"/>
-                    <a:pt x="0" y="791701"/>
-                  </a:cubicBezTo>
-                  <a:lnTo>
-                    <a:pt x="0" y="10160"/>
-                  </a:lnTo>
-                  <a:cubicBezTo>
-                    <a:pt x="0" y="4549"/>
-                    <a:pt x="4549" y="0"/>
-                    <a:pt x="10160" y="0"/>
-                  </a:cubicBezTo>
-                  <a:lnTo>
-                    <a:pt x="4806433" y="0"/>
-                  </a:lnTo>
-                  <a:cubicBezTo>
-                    <a:pt x="4809127" y="0"/>
-                    <a:pt x="4811711" y="1070"/>
-                    <a:pt x="4813617" y="2976"/>
-                  </a:cubicBezTo>
-                  <a:cubicBezTo>
-                    <a:pt x="4815522" y="4881"/>
-                    <a:pt x="4816592" y="7465"/>
-                    <a:pt x="4816592" y="10160"/>
-                  </a:cubicBezTo>
-                  <a:close/>
-                </a:path>
-              </a:pathLst>
-            </a:custGeom>
-            <a:solidFill>
-              <a:srgbClr val="FFFFFF"/>
-            </a:solidFill>
-          </p:spPr>
-        </p:sp>
-        <p:sp>
-          <p:nvSpPr>
-            <p:cNvPr name="TextBox 10" id="10"/>
-            <p:cNvSpPr txBox="true"/>
-            <p:nvPr/>
-          </p:nvSpPr>
-          <p:spPr>
-            <a:xfrm>
-              <a:off x="0" y="-47625"/>
-              <a:ext cx="4816593" cy="849486"/>
-            </a:xfrm>
-            <a:prstGeom prst="rect">
-              <a:avLst/>
-            </a:prstGeom>
-          </p:spPr>
-          <p:txBody>
-            <a:bodyPr anchor="ctr" rtlCol="false" tIns="50800" lIns="50800" bIns="50800" rIns="50800"/>
-            <a:lstStyle/>
-            <a:p>
-              <a:pPr algn="ctr">
-                <a:lnSpc>
-                  <a:spcPts val="2659"/>
-                </a:lnSpc>
-              </a:pPr>
-            </a:p>
-          </p:txBody>
-        </p:sp>
-      </p:grpSp>
-      <p:grpSp>
-        <p:nvGrpSpPr>
-          <p:cNvPr name="Group 11" id="11"/>
-          <p:cNvGrpSpPr/>
-          <p:nvPr/>
-        </p:nvGrpSpPr>
-        <p:grpSpPr>
-          <a:xfrm rot="0">
-            <a:off x="3775584" y="1437554"/>
-            <a:ext cx="14512416" cy="5651853"/>
-            <a:chOff x="0" y="0"/>
-            <a:chExt cx="3822200" cy="1488247"/>
-          </a:xfrm>
-        </p:grpSpPr>
-        <p:sp>
-          <p:nvSpPr>
-            <p:cNvPr name="Freeform 12" id="12"/>
-            <p:cNvSpPr/>
-            <p:nvPr/>
-          </p:nvSpPr>
-          <p:spPr>
-            <a:xfrm flipH="false" flipV="false" rot="0">
-              <a:off x="0" y="0"/>
-              <a:ext cx="3822200" cy="1488248"/>
-            </a:xfrm>
-            <a:custGeom>
-              <a:avLst/>
-              <a:gdLst/>
-              <a:ahLst/>
-              <a:cxnLst/>
-              <a:rect r="r" b="b" t="t" l="l"/>
-              <a:pathLst>
-                <a:path h="1488248" w="3822200">
-                  <a:moveTo>
-                    <a:pt x="3822200" y="12803"/>
-                  </a:moveTo>
-                  <a:lnTo>
-                    <a:pt x="3822200" y="1475444"/>
-                  </a:lnTo>
-                  <a:cubicBezTo>
-                    <a:pt x="3822200" y="1482515"/>
-                    <a:pt x="3816468" y="1488248"/>
-                    <a:pt x="3809397" y="1488248"/>
-                  </a:cubicBezTo>
-                  <a:lnTo>
-                    <a:pt x="12803" y="1488248"/>
-                  </a:lnTo>
-                  <a:cubicBezTo>
-                    <a:pt x="5732" y="1488248"/>
-                    <a:pt x="0" y="1482515"/>
-                    <a:pt x="0" y="1475444"/>
-                  </a:cubicBezTo>
-                  <a:lnTo>
-                    <a:pt x="0" y="12803"/>
-                  </a:lnTo>
-                  <a:cubicBezTo>
-                    <a:pt x="0" y="5732"/>
-                    <a:pt x="5732" y="0"/>
-                    <a:pt x="12803" y="0"/>
-                  </a:cubicBezTo>
-                  <a:lnTo>
-                    <a:pt x="3809397" y="0"/>
-                  </a:lnTo>
-                  <a:cubicBezTo>
-                    <a:pt x="3816468" y="0"/>
-                    <a:pt x="3822200" y="5732"/>
-                    <a:pt x="3822200" y="12803"/>
-                  </a:cubicBezTo>
-                  <a:close/>
-                </a:path>
-              </a:pathLst>
-            </a:custGeom>
-            <a:solidFill>
-              <a:srgbClr val="FFFFFF"/>
-            </a:solidFill>
-          </p:spPr>
-        </p:sp>
-        <p:sp>
-          <p:nvSpPr>
-            <p:cNvPr name="TextBox 13" id="13"/>
-            <p:cNvSpPr txBox="true"/>
-            <p:nvPr/>
-          </p:nvSpPr>
-          <p:spPr>
-            <a:xfrm>
-              <a:off x="0" y="-47625"/>
-              <a:ext cx="3822200" cy="1535872"/>
-            </a:xfrm>
-            <a:prstGeom prst="rect">
-              <a:avLst/>
-            </a:prstGeom>
-          </p:spPr>
-          <p:txBody>
-            <a:bodyPr anchor="ctr" rtlCol="false" tIns="50800" lIns="50800" bIns="50800" rIns="50800"/>
-            <a:lstStyle/>
-            <a:p>
-              <a:pPr algn="ctr">
-                <a:lnSpc>
-                  <a:spcPts val="2659"/>
-                </a:lnSpc>
-              </a:pPr>
-            </a:p>
-          </p:txBody>
-        </p:sp>
-      </p:grpSp>
-    </p:spTree>
-  </p:cSld>
-  <p:clrMapOvr>
-    <a:masterClrMapping/>
-  </p:clrMapOvr>
-</p:sld>
-</file>
-
-<file path=ppt/slides/slide2.xml><?xml version="1.0" encoding="utf-8"?>
-<p:sld xmlns:p="http://schemas.openxmlformats.org/presentationml/2006/main" xmlns:a="http://schemas.openxmlformats.org/drawingml/2006/main">
-  <p:cSld>
-    <p:bg>
-      <p:bgPr>
-        <a:gradFill rotWithShape="true">
-          <a:gsLst>
-            <a:gs pos="0">
-              <a:srgbClr val="FFFFFF">
-                <a:alpha val="100000"/>
-              </a:srgbClr>
-            </a:gs>
-            <a:gs pos="50000">
-              <a:srgbClr val="68C9FF">
-                <a:alpha val="100000"/>
-              </a:srgbClr>
-            </a:gs>
-            <a:gs pos="100000">
-              <a:srgbClr val="000000">
-                <a:alpha val="100000"/>
-              </a:srgbClr>
-            </a:gs>
-          </a:gsLst>
-          <a:lin ang="0"/>
-        </a:gradFill>
-      </p:bgPr>
-    </p:bg>
-    <p:spTree>
-      <p:nvGrpSpPr>
-        <p:cNvPr id="1" name=""/>
-        <p:cNvGrpSpPr/>
-        <p:nvPr/>
-      </p:nvGrpSpPr>
-      <p:grpSpPr>
-        <a:xfrm>
-          <a:off x="0" y="0"/>
-          <a:ext cx="0" cy="0"/>
-          <a:chOff x="0" y="0"/>
-          <a:chExt cx="0" cy="0"/>
-        </a:xfrm>
-      </p:grpSpPr>
-      <p:grpSp>
-        <p:nvGrpSpPr>
-          <p:cNvPr name="Group 2" id="2"/>
-          <p:cNvGrpSpPr/>
-          <p:nvPr/>
-        </p:nvGrpSpPr>
-        <p:grpSpPr>
-          <a:xfrm rot="0">
-            <a:off x="0" y="1185218"/>
-            <a:ext cx="3619056" cy="5904189"/>
-            <a:chOff x="0" y="0"/>
-            <a:chExt cx="953167" cy="1554693"/>
-          </a:xfrm>
-        </p:grpSpPr>
-        <p:sp>
-          <p:nvSpPr>
-            <p:cNvPr name="Freeform 3" id="3"/>
-            <p:cNvSpPr/>
-            <p:nvPr/>
-          </p:nvSpPr>
-          <p:spPr>
-            <a:xfrm flipH="false" flipV="false" rot="0">
-              <a:off x="0" y="0"/>
-              <a:ext cx="953167" cy="1554693"/>
-            </a:xfrm>
-            <a:custGeom>
-              <a:avLst/>
-              <a:gdLst/>
-              <a:ahLst/>
-              <a:cxnLst/>
-              <a:rect r="r" b="b" t="t" l="l"/>
-              <a:pathLst>
-                <a:path h="1554693" w="953167">
-                  <a:moveTo>
-                    <a:pt x="953167" y="51341"/>
-                  </a:moveTo>
-                  <a:lnTo>
-                    <a:pt x="953167" y="1503352"/>
-                  </a:lnTo>
-                  <a:cubicBezTo>
-                    <a:pt x="953167" y="1516968"/>
-                    <a:pt x="947758" y="1530027"/>
-                    <a:pt x="938130" y="1539655"/>
-                  </a:cubicBezTo>
-                  <a:cubicBezTo>
-                    <a:pt x="928501" y="1549284"/>
-                    <a:pt x="915442" y="1554693"/>
-                    <a:pt x="901826" y="1554693"/>
-                  </a:cubicBezTo>
-                  <a:lnTo>
-                    <a:pt x="51341" y="1554693"/>
-                  </a:lnTo>
-                  <a:cubicBezTo>
-                    <a:pt x="37725" y="1554693"/>
-                    <a:pt x="24666" y="1549284"/>
-                    <a:pt x="15037" y="1539655"/>
-                  </a:cubicBezTo>
-                  <a:cubicBezTo>
-                    <a:pt x="5409" y="1530027"/>
-                    <a:pt x="0" y="1516968"/>
-                    <a:pt x="0" y="1503352"/>
-                  </a:cubicBezTo>
-                  <a:lnTo>
-                    <a:pt x="0" y="51341"/>
-                  </a:lnTo>
-                  <a:cubicBezTo>
-                    <a:pt x="0" y="37725"/>
-                    <a:pt x="5409" y="24666"/>
-                    <a:pt x="15037" y="15037"/>
-                  </a:cubicBezTo>
-                  <a:cubicBezTo>
-                    <a:pt x="24666" y="5409"/>
-                    <a:pt x="37725" y="0"/>
-                    <a:pt x="51341" y="0"/>
-                  </a:cubicBezTo>
-                  <a:lnTo>
-                    <a:pt x="901826" y="0"/>
-                  </a:lnTo>
-                  <a:cubicBezTo>
-                    <a:pt x="915442" y="0"/>
-                    <a:pt x="928501" y="5409"/>
-                    <a:pt x="938130" y="15037"/>
-                  </a:cubicBezTo>
-                  <a:cubicBezTo>
-                    <a:pt x="947758" y="24666"/>
-                    <a:pt x="953167" y="37725"/>
-                    <a:pt x="953167" y="51341"/>
-                  </a:cubicBezTo>
-                  <a:close/>
-                </a:path>
-              </a:pathLst>
-            </a:custGeom>
-            <a:solidFill>
-              <a:srgbClr val="545454"/>
-            </a:solidFill>
-          </p:spPr>
-        </p:sp>
-        <p:sp>
-          <p:nvSpPr>
-            <p:cNvPr name="TextBox 4" id="4"/>
-            <p:cNvSpPr txBox="true"/>
-            <p:nvPr/>
-          </p:nvSpPr>
-          <p:spPr>
-            <a:xfrm>
-              <a:off x="0" y="-47625"/>
-              <a:ext cx="953167" cy="1602318"/>
-            </a:xfrm>
-            <a:prstGeom prst="rect">
-              <a:avLst/>
-            </a:prstGeom>
-          </p:spPr>
-          <p:txBody>
-            <a:bodyPr anchor="ctr" rtlCol="false" tIns="50800" lIns="50800" bIns="50800" rIns="50800"/>
-            <a:lstStyle/>
-            <a:p>
-              <a:pPr algn="ctr">
-                <a:lnSpc>
-                  <a:spcPts val="2659"/>
-                </a:lnSpc>
-              </a:pPr>
-            </a:p>
-          </p:txBody>
-        </p:sp>
-      </p:grpSp>
-      <p:grpSp>
-        <p:nvGrpSpPr>
-          <p:cNvPr name="Group 5" id="5"/>
-          <p:cNvGrpSpPr/>
-          <p:nvPr/>
-        </p:nvGrpSpPr>
-        <p:grpSpPr>
-          <a:xfrm rot="0">
-            <a:off x="0" y="0"/>
-            <a:ext cx="3619056" cy="1028700"/>
-            <a:chOff x="0" y="0"/>
-            <a:chExt cx="953167" cy="270878"/>
-          </a:xfrm>
-        </p:grpSpPr>
-        <p:sp>
-          <p:nvSpPr>
-            <p:cNvPr name="Freeform 6" id="6"/>
-            <p:cNvSpPr/>
-            <p:nvPr/>
-          </p:nvSpPr>
-          <p:spPr>
-            <a:xfrm flipH="false" flipV="false" rot="0">
-              <a:off x="0" y="0"/>
-              <a:ext cx="953167" cy="270878"/>
-            </a:xfrm>
-            <a:custGeom>
-              <a:avLst/>
-              <a:gdLst/>
-              <a:ahLst/>
-              <a:cxnLst/>
-              <a:rect r="r" b="b" t="t" l="l"/>
-              <a:pathLst>
-                <a:path h="270878" w="953167">
-                  <a:moveTo>
-                    <a:pt x="953167" y="51341"/>
-                  </a:moveTo>
-                  <a:lnTo>
-                    <a:pt x="953167" y="219537"/>
-                  </a:lnTo>
-                  <a:cubicBezTo>
-                    <a:pt x="953167" y="233153"/>
-                    <a:pt x="947758" y="246212"/>
-                    <a:pt x="938130" y="255840"/>
-                  </a:cubicBezTo>
-                  <a:cubicBezTo>
-                    <a:pt x="928501" y="265468"/>
-                    <a:pt x="915442" y="270878"/>
-                    <a:pt x="901826" y="270878"/>
-                  </a:cubicBezTo>
-                  <a:lnTo>
-                    <a:pt x="51341" y="270878"/>
-                  </a:lnTo>
-                  <a:cubicBezTo>
-                    <a:pt x="37725" y="270878"/>
-                    <a:pt x="24666" y="265468"/>
-                    <a:pt x="15037" y="255840"/>
-                  </a:cubicBezTo>
-                  <a:cubicBezTo>
-                    <a:pt x="5409" y="246212"/>
-                    <a:pt x="0" y="233153"/>
-                    <a:pt x="0" y="219537"/>
-                  </a:cubicBezTo>
-                  <a:lnTo>
-                    <a:pt x="0" y="51341"/>
-                  </a:lnTo>
-                  <a:cubicBezTo>
-                    <a:pt x="0" y="37725"/>
-                    <a:pt x="5409" y="24666"/>
-                    <a:pt x="15037" y="15037"/>
-                  </a:cubicBezTo>
-                  <a:cubicBezTo>
-                    <a:pt x="24666" y="5409"/>
-                    <a:pt x="37725" y="0"/>
-                    <a:pt x="51341" y="0"/>
-                  </a:cubicBezTo>
-                  <a:lnTo>
-                    <a:pt x="901826" y="0"/>
-                  </a:lnTo>
-                  <a:cubicBezTo>
-                    <a:pt x="915442" y="0"/>
-                    <a:pt x="928501" y="5409"/>
-                    <a:pt x="938130" y="15037"/>
-                  </a:cubicBezTo>
-                  <a:cubicBezTo>
-                    <a:pt x="947758" y="24666"/>
-                    <a:pt x="953167" y="37725"/>
-                    <a:pt x="953167" y="51341"/>
-                  </a:cubicBezTo>
-                  <a:close/>
-                </a:path>
-              </a:pathLst>
-            </a:custGeom>
-            <a:solidFill>
-              <a:srgbClr val="545454"/>
-            </a:solidFill>
-          </p:spPr>
-        </p:sp>
-        <p:sp>
-          <p:nvSpPr>
-            <p:cNvPr name="TextBox 7" id="7"/>
-            <p:cNvSpPr txBox="true"/>
-            <p:nvPr/>
-          </p:nvSpPr>
-          <p:spPr>
-            <a:xfrm>
-              <a:off x="0" y="-47625"/>
-              <a:ext cx="953167" cy="318503"/>
-            </a:xfrm>
-            <a:prstGeom prst="rect">
-              <a:avLst/>
-            </a:prstGeom>
-          </p:spPr>
-          <p:txBody>
-            <a:bodyPr anchor="ctr" rtlCol="false" tIns="50800" lIns="50800" bIns="50800" rIns="50800"/>
-            <a:lstStyle/>
-            <a:p>
-              <a:pPr algn="ctr">
-                <a:lnSpc>
-                  <a:spcPts val="2659"/>
-                </a:lnSpc>
-              </a:pPr>
-            </a:p>
-          </p:txBody>
-        </p:sp>
-      </p:grpSp>
-      <p:grpSp>
-        <p:nvGrpSpPr>
-          <p:cNvPr name="Group 8" id="8"/>
-          <p:cNvGrpSpPr/>
-          <p:nvPr/>
-        </p:nvGrpSpPr>
-        <p:grpSpPr>
-          <a:xfrm rot="0">
-            <a:off x="3776014" y="1185218"/>
-            <a:ext cx="5238574" cy="5904189"/>
-            <a:chOff x="0" y="0"/>
-            <a:chExt cx="1379707" cy="1554693"/>
-          </a:xfrm>
-        </p:grpSpPr>
-        <p:sp>
-          <p:nvSpPr>
-            <p:cNvPr name="Freeform 9" id="9"/>
-            <p:cNvSpPr/>
-            <p:nvPr/>
-          </p:nvSpPr>
-          <p:spPr>
-            <a:xfrm flipH="false" flipV="false" rot="0">
-              <a:off x="0" y="0"/>
-              <a:ext cx="1379707" cy="1554693"/>
-            </a:xfrm>
-            <a:custGeom>
-              <a:avLst/>
-              <a:gdLst/>
-              <a:ahLst/>
-              <a:cxnLst/>
-              <a:rect r="r" b="b" t="t" l="l"/>
-              <a:pathLst>
-                <a:path h="1554693" w="1379707">
-                  <a:moveTo>
-                    <a:pt x="1379707" y="35469"/>
-                  </a:moveTo>
-                  <a:lnTo>
-                    <a:pt x="1379707" y="1519224"/>
-                  </a:lnTo>
-                  <a:cubicBezTo>
-                    <a:pt x="1379707" y="1528631"/>
-                    <a:pt x="1375970" y="1537652"/>
-                    <a:pt x="1369318" y="1544304"/>
-                  </a:cubicBezTo>
-                  <a:cubicBezTo>
-                    <a:pt x="1362667" y="1550956"/>
-                    <a:pt x="1353645" y="1554693"/>
-                    <a:pt x="1344238" y="1554693"/>
-                  </a:cubicBezTo>
-                  <a:lnTo>
-                    <a:pt x="35469" y="1554693"/>
-                  </a:lnTo>
-                  <a:cubicBezTo>
-                    <a:pt x="15880" y="1554693"/>
-                    <a:pt x="0" y="1538813"/>
-                    <a:pt x="0" y="1519224"/>
-                  </a:cubicBezTo>
-                  <a:lnTo>
-                    <a:pt x="0" y="35469"/>
-                  </a:lnTo>
-                  <a:cubicBezTo>
-                    <a:pt x="0" y="15880"/>
-                    <a:pt x="15880" y="0"/>
-                    <a:pt x="35469" y="0"/>
-                  </a:cubicBezTo>
-                  <a:lnTo>
-                    <a:pt x="1344238" y="0"/>
-                  </a:lnTo>
-                  <a:cubicBezTo>
-                    <a:pt x="1363827" y="0"/>
-                    <a:pt x="1379707" y="15880"/>
-                    <a:pt x="1379707" y="35469"/>
-                  </a:cubicBezTo>
-                  <a:close/>
-                </a:path>
-              </a:pathLst>
-            </a:custGeom>
-            <a:solidFill>
-              <a:srgbClr val="FFFFFF"/>
-            </a:solidFill>
-          </p:spPr>
-        </p:sp>
-        <p:sp>
-          <p:nvSpPr>
-            <p:cNvPr name="TextBox 10" id="10"/>
-            <p:cNvSpPr txBox="true"/>
-            <p:nvPr/>
-          </p:nvSpPr>
-          <p:spPr>
-            <a:xfrm>
-              <a:off x="0" y="-47625"/>
-              <a:ext cx="1379707" cy="1602318"/>
-            </a:xfrm>
-            <a:prstGeom prst="rect">
-              <a:avLst/>
-            </a:prstGeom>
-          </p:spPr>
-          <p:txBody>
-            <a:bodyPr anchor="ctr" rtlCol="false" tIns="50800" lIns="50800" bIns="50800" rIns="50800"/>
-            <a:lstStyle/>
-            <a:p>
-              <a:pPr algn="ctr">
-                <a:lnSpc>
-                  <a:spcPts val="2659"/>
-                </a:lnSpc>
-              </a:pPr>
-            </a:p>
-          </p:txBody>
-        </p:sp>
-      </p:grpSp>
-      <p:grpSp>
-        <p:nvGrpSpPr>
-          <p:cNvPr name="Group 11" id="11"/>
-          <p:cNvGrpSpPr/>
-          <p:nvPr/>
-        </p:nvGrpSpPr>
-        <p:grpSpPr>
-          <a:xfrm rot="0">
-            <a:off x="22558" y="7241807"/>
-            <a:ext cx="8992030" cy="3045193"/>
-            <a:chOff x="0" y="0"/>
-            <a:chExt cx="2368271" cy="801861"/>
-          </a:xfrm>
-        </p:grpSpPr>
-        <p:sp>
-          <p:nvSpPr>
-            <p:cNvPr name="Freeform 12" id="12"/>
-            <p:cNvSpPr/>
-            <p:nvPr/>
-          </p:nvSpPr>
-          <p:spPr>
-            <a:xfrm flipH="false" flipV="false" rot="0">
-              <a:off x="0" y="0"/>
-              <a:ext cx="2368271" cy="801861"/>
-            </a:xfrm>
-            <a:custGeom>
-              <a:avLst/>
-              <a:gdLst/>
-              <a:ahLst/>
-              <a:cxnLst/>
-              <a:rect r="r" b="b" t="t" l="l"/>
-              <a:pathLst>
-                <a:path h="801861" w="2368271">
-                  <a:moveTo>
-                    <a:pt x="2368271" y="20663"/>
-                  </a:moveTo>
-                  <a:lnTo>
-                    <a:pt x="2368271" y="781198"/>
-                  </a:lnTo>
-                  <a:cubicBezTo>
-                    <a:pt x="2368271" y="786678"/>
-                    <a:pt x="2366094" y="791934"/>
-                    <a:pt x="2362219" y="795809"/>
-                  </a:cubicBezTo>
-                  <a:cubicBezTo>
-                    <a:pt x="2358344" y="799684"/>
-                    <a:pt x="2353088" y="801861"/>
-                    <a:pt x="2347608" y="801861"/>
-                  </a:cubicBezTo>
-                  <a:lnTo>
-                    <a:pt x="20663" y="801861"/>
-                  </a:lnTo>
-                  <a:cubicBezTo>
-                    <a:pt x="9251" y="801861"/>
-                    <a:pt x="0" y="792610"/>
-                    <a:pt x="0" y="781198"/>
-                  </a:cubicBezTo>
-                  <a:lnTo>
-                    <a:pt x="0" y="20663"/>
-                  </a:lnTo>
-                  <a:cubicBezTo>
-                    <a:pt x="0" y="15183"/>
-                    <a:pt x="2177" y="9927"/>
-                    <a:pt x="6052" y="6052"/>
-                  </a:cubicBezTo>
-                  <a:cubicBezTo>
-                    <a:pt x="9927" y="2177"/>
-                    <a:pt x="15183" y="0"/>
-                    <a:pt x="20663" y="0"/>
-                  </a:cubicBezTo>
-                  <a:lnTo>
-                    <a:pt x="2347608" y="0"/>
-                  </a:lnTo>
-                  <a:cubicBezTo>
-                    <a:pt x="2359020" y="0"/>
-                    <a:pt x="2368271" y="9251"/>
-                    <a:pt x="2368271" y="20663"/>
-                  </a:cubicBezTo>
-                  <a:close/>
-                </a:path>
-              </a:pathLst>
-            </a:custGeom>
-            <a:solidFill>
-              <a:srgbClr val="FFFFFF"/>
-            </a:solidFill>
-          </p:spPr>
-        </p:sp>
-        <p:sp>
-          <p:nvSpPr>
-            <p:cNvPr name="TextBox 13" id="13"/>
-            <p:cNvSpPr txBox="true"/>
-            <p:nvPr/>
-          </p:nvSpPr>
-          <p:spPr>
-            <a:xfrm>
-              <a:off x="0" y="-47625"/>
-              <a:ext cx="2368271" cy="849486"/>
-            </a:xfrm>
-            <a:prstGeom prst="rect">
-              <a:avLst/>
-            </a:prstGeom>
-          </p:spPr>
-          <p:txBody>
-            <a:bodyPr anchor="ctr" rtlCol="false" tIns="50800" lIns="50800" bIns="50800" rIns="50800"/>
-            <a:lstStyle/>
-            <a:p>
-              <a:pPr algn="ctr">
-                <a:lnSpc>
-                  <a:spcPts val="2659"/>
-                </a:lnSpc>
-              </a:pPr>
-            </a:p>
-          </p:txBody>
-        </p:sp>
-      </p:grpSp>
-      <p:grpSp>
-        <p:nvGrpSpPr>
-          <p:cNvPr name="Group 14" id="14"/>
-          <p:cNvGrpSpPr/>
-          <p:nvPr/>
-        </p:nvGrpSpPr>
-        <p:grpSpPr>
-          <a:xfrm rot="0">
-            <a:off x="9166988" y="1185218"/>
-            <a:ext cx="9121442" cy="4496929"/>
-            <a:chOff x="0" y="0"/>
-            <a:chExt cx="2402355" cy="1184133"/>
-          </a:xfrm>
-        </p:grpSpPr>
-        <p:sp>
-          <p:nvSpPr>
-            <p:cNvPr name="Freeform 15" id="15"/>
-            <p:cNvSpPr/>
-            <p:nvPr/>
-          </p:nvSpPr>
-          <p:spPr>
-            <a:xfrm flipH="false" flipV="false" rot="0">
-              <a:off x="0" y="0"/>
-              <a:ext cx="2402355" cy="1184133"/>
-            </a:xfrm>
-            <a:custGeom>
-              <a:avLst/>
-              <a:gdLst/>
-              <a:ahLst/>
-              <a:cxnLst/>
-              <a:rect r="r" b="b" t="t" l="l"/>
-              <a:pathLst>
-                <a:path h="1184133" w="2402355">
-                  <a:moveTo>
-                    <a:pt x="2402355" y="20370"/>
-                  </a:moveTo>
-                  <a:lnTo>
-                    <a:pt x="2402355" y="1163762"/>
-                  </a:lnTo>
-                  <a:cubicBezTo>
-                    <a:pt x="2402355" y="1175013"/>
-                    <a:pt x="2393235" y="1184133"/>
-                    <a:pt x="2381985" y="1184133"/>
-                  </a:cubicBezTo>
-                  <a:lnTo>
-                    <a:pt x="20370" y="1184133"/>
-                  </a:lnTo>
-                  <a:cubicBezTo>
-                    <a:pt x="14968" y="1184133"/>
-                    <a:pt x="9786" y="1181986"/>
-                    <a:pt x="5966" y="1178166"/>
-                  </a:cubicBezTo>
-                  <a:cubicBezTo>
-                    <a:pt x="2146" y="1174346"/>
-                    <a:pt x="0" y="1169165"/>
-                    <a:pt x="0" y="1163762"/>
-                  </a:cubicBezTo>
-                  <a:lnTo>
-                    <a:pt x="0" y="20370"/>
-                  </a:lnTo>
-                  <a:cubicBezTo>
-                    <a:pt x="0" y="14968"/>
-                    <a:pt x="2146" y="9786"/>
-                    <a:pt x="5966" y="5966"/>
-                  </a:cubicBezTo>
-                  <a:cubicBezTo>
-                    <a:pt x="9786" y="2146"/>
-                    <a:pt x="14968" y="0"/>
-                    <a:pt x="20370" y="0"/>
-                  </a:cubicBezTo>
-                  <a:lnTo>
-                    <a:pt x="2381985" y="0"/>
-                  </a:lnTo>
-                  <a:cubicBezTo>
-                    <a:pt x="2387387" y="0"/>
-                    <a:pt x="2392569" y="2146"/>
-                    <a:pt x="2396389" y="5966"/>
-                  </a:cubicBezTo>
-                  <a:cubicBezTo>
-                    <a:pt x="2400209" y="9786"/>
-                    <a:pt x="2402355" y="14968"/>
-                    <a:pt x="2402355" y="20370"/>
-                  </a:cubicBezTo>
-                  <a:close/>
-                </a:path>
-              </a:pathLst>
-            </a:custGeom>
-            <a:solidFill>
-              <a:srgbClr val="FFFFFF"/>
-            </a:solidFill>
-          </p:spPr>
-        </p:sp>
-        <p:sp>
-          <p:nvSpPr>
-            <p:cNvPr name="TextBox 16" id="16"/>
-            <p:cNvSpPr txBox="true"/>
-            <p:nvPr/>
-          </p:nvSpPr>
-          <p:spPr>
-            <a:xfrm>
-              <a:off x="0" y="-47625"/>
-              <a:ext cx="2402355" cy="1231758"/>
-            </a:xfrm>
-            <a:prstGeom prst="rect">
-              <a:avLst/>
-            </a:prstGeom>
-          </p:spPr>
-          <p:txBody>
-            <a:bodyPr anchor="ctr" rtlCol="false" tIns="50800" lIns="50800" bIns="50800" rIns="50800"/>
-            <a:lstStyle/>
-            <a:p>
-              <a:pPr algn="ctr">
-                <a:lnSpc>
-                  <a:spcPts val="2659"/>
-                </a:lnSpc>
-              </a:pPr>
-            </a:p>
-          </p:txBody>
-        </p:sp>
-      </p:grpSp>
-      <p:grpSp>
-        <p:nvGrpSpPr>
-          <p:cNvPr name="Group 17" id="17"/>
-          <p:cNvGrpSpPr/>
-          <p:nvPr/>
-        </p:nvGrpSpPr>
-        <p:grpSpPr>
-          <a:xfrm rot="0">
-            <a:off x="9166988" y="5836339"/>
-            <a:ext cx="9121012" cy="4450661"/>
-            <a:chOff x="0" y="0"/>
-            <a:chExt cx="2402242" cy="1171949"/>
-          </a:xfrm>
-        </p:grpSpPr>
-        <p:sp>
-          <p:nvSpPr>
-            <p:cNvPr name="Freeform 18" id="18"/>
-            <p:cNvSpPr/>
-            <p:nvPr/>
-          </p:nvSpPr>
-          <p:spPr>
-            <a:xfrm flipH="false" flipV="false" rot="0">
-              <a:off x="0" y="0"/>
-              <a:ext cx="2402242" cy="1171949"/>
-            </a:xfrm>
-            <a:custGeom>
-              <a:avLst/>
-              <a:gdLst/>
-              <a:ahLst/>
-              <a:cxnLst/>
-              <a:rect r="r" b="b" t="t" l="l"/>
-              <a:pathLst>
-                <a:path h="1171949" w="2402242">
-                  <a:moveTo>
-                    <a:pt x="2402242" y="20371"/>
-                  </a:moveTo>
-                  <a:lnTo>
-                    <a:pt x="2402242" y="1151578"/>
-                  </a:lnTo>
-                  <a:cubicBezTo>
-                    <a:pt x="2402242" y="1156981"/>
-                    <a:pt x="2400096" y="1162162"/>
-                    <a:pt x="2396275" y="1165983"/>
-                  </a:cubicBezTo>
-                  <a:cubicBezTo>
-                    <a:pt x="2392455" y="1169803"/>
-                    <a:pt x="2387273" y="1171949"/>
-                    <a:pt x="2381871" y="1171949"/>
-                  </a:cubicBezTo>
-                  <a:lnTo>
-                    <a:pt x="20371" y="1171949"/>
-                  </a:lnTo>
-                  <a:cubicBezTo>
-                    <a:pt x="14968" y="1171949"/>
-                    <a:pt x="9787" y="1169803"/>
-                    <a:pt x="5967" y="1165983"/>
-                  </a:cubicBezTo>
-                  <a:cubicBezTo>
-                    <a:pt x="2146" y="1162162"/>
-                    <a:pt x="0" y="1156981"/>
-                    <a:pt x="0" y="1151578"/>
-                  </a:cubicBezTo>
-                  <a:lnTo>
-                    <a:pt x="0" y="20371"/>
-                  </a:lnTo>
-                  <a:cubicBezTo>
-                    <a:pt x="0" y="14968"/>
-                    <a:pt x="2146" y="9787"/>
-                    <a:pt x="5967" y="5967"/>
-                  </a:cubicBezTo>
-                  <a:cubicBezTo>
-                    <a:pt x="9787" y="2146"/>
-                    <a:pt x="14968" y="0"/>
-                    <a:pt x="20371" y="0"/>
-                  </a:cubicBezTo>
-                  <a:lnTo>
-                    <a:pt x="2381871" y="0"/>
-                  </a:lnTo>
-                  <a:cubicBezTo>
-                    <a:pt x="2387273" y="0"/>
-                    <a:pt x="2392455" y="2146"/>
-                    <a:pt x="2396275" y="5967"/>
-                  </a:cubicBezTo>
-                  <a:cubicBezTo>
-                    <a:pt x="2400096" y="9787"/>
-                    <a:pt x="2402242" y="14968"/>
-                    <a:pt x="2402242" y="20371"/>
-                  </a:cubicBezTo>
-                  <a:close/>
-                </a:path>
-              </a:pathLst>
-            </a:custGeom>
-            <a:solidFill>
-              <a:srgbClr val="FFFFFF"/>
-            </a:solidFill>
-          </p:spPr>
-        </p:sp>
-        <p:sp>
-          <p:nvSpPr>
-            <p:cNvPr name="TextBox 19" id="19"/>
-            <p:cNvSpPr txBox="true"/>
-            <p:nvPr/>
-          </p:nvSpPr>
-          <p:spPr>
-            <a:xfrm>
-              <a:off x="0" y="-47625"/>
-              <a:ext cx="2402242" cy="1219574"/>
-            </a:xfrm>
-            <a:prstGeom prst="rect">
-              <a:avLst/>
-            </a:prstGeom>
-          </p:spPr>
-          <p:txBody>
-            <a:bodyPr anchor="ctr" rtlCol="false" tIns="50800" lIns="50800" bIns="50800" rIns="50800"/>
-            <a:lstStyle/>
-            <a:p>
-              <a:pPr algn="ctr">
-                <a:lnSpc>
-                  <a:spcPts val="2659"/>
-                </a:lnSpc>
-              </a:pPr>
-            </a:p>
-          </p:txBody>
-        </p:sp>
-      </p:grpSp>
-    </p:spTree>
-  </p:cSld>
-  <p:clrMapOvr>
-    <a:masterClrMapping/>
-  </p:clrMapOvr>
-</p:sld>
-</file>
-
-<file path=ppt/slides/slide3.xml><?xml version="1.0" encoding="utf-8"?>
-<p:sld xmlns:p="http://schemas.openxmlformats.org/presentationml/2006/main" xmlns:a="http://schemas.openxmlformats.org/drawingml/2006/main">
-  <p:cSld>
-    <p:bg>
-      <p:bgPr>
-        <a:gradFill rotWithShape="true">
-          <a:gsLst>
-            <a:gs pos="0">
-              <a:srgbClr val="FFFFFF">
-                <a:alpha val="100000"/>
-              </a:srgbClr>
-            </a:gs>
-            <a:gs pos="50000">
-              <a:srgbClr val="68C9FF">
-                <a:alpha val="100000"/>
-              </a:srgbClr>
-            </a:gs>
-            <a:gs pos="100000">
-              <a:srgbClr val="000000">
-                <a:alpha val="100000"/>
-              </a:srgbClr>
-            </a:gs>
-          </a:gsLst>
-          <a:lin ang="0"/>
-        </a:gradFill>
-      </p:bgPr>
-    </p:bg>
-    <p:spTree>
-      <p:nvGrpSpPr>
-        <p:cNvPr id="1" name=""/>
-        <p:cNvGrpSpPr/>
-        <p:nvPr/>
-      </p:nvGrpSpPr>
-      <p:grpSpPr>
-        <a:xfrm>
-          <a:off x="0" y="0"/>
-          <a:ext cx="0" cy="0"/>
-          <a:chOff x="0" y="0"/>
-          <a:chExt cx="0" cy="0"/>
-        </a:xfrm>
-      </p:grpSpPr>
-      <p:grpSp>
-        <p:nvGrpSpPr>
-          <p:cNvPr name="Group 2" id="2"/>
-          <p:cNvGrpSpPr/>
-          <p:nvPr/>
-        </p:nvGrpSpPr>
-        <p:grpSpPr>
-          <a:xfrm rot="0">
-            <a:off x="0" y="1185218"/>
-            <a:ext cx="3619056" cy="5904189"/>
-            <a:chOff x="0" y="0"/>
-            <a:chExt cx="953167" cy="1554693"/>
-          </a:xfrm>
-        </p:grpSpPr>
-        <p:sp>
-          <p:nvSpPr>
-            <p:cNvPr name="Freeform 3" id="3"/>
-            <p:cNvSpPr/>
-            <p:nvPr/>
-          </p:nvSpPr>
-          <p:spPr>
-            <a:xfrm flipH="false" flipV="false" rot="0">
-              <a:off x="0" y="0"/>
-              <a:ext cx="953167" cy="1554693"/>
-            </a:xfrm>
-            <a:custGeom>
-              <a:avLst/>
-              <a:gdLst/>
-              <a:ahLst/>
-              <a:cxnLst/>
-              <a:rect r="r" b="b" t="t" l="l"/>
-              <a:pathLst>
-                <a:path h="1554693" w="953167">
-                  <a:moveTo>
-                    <a:pt x="953167" y="51341"/>
-                  </a:moveTo>
-                  <a:lnTo>
-                    <a:pt x="953167" y="1503352"/>
-                  </a:lnTo>
-                  <a:cubicBezTo>
-                    <a:pt x="953167" y="1516968"/>
-                    <a:pt x="947758" y="1530027"/>
-                    <a:pt x="938130" y="1539655"/>
-                  </a:cubicBezTo>
-                  <a:cubicBezTo>
-                    <a:pt x="928501" y="1549284"/>
-                    <a:pt x="915442" y="1554693"/>
-                    <a:pt x="901826" y="1554693"/>
-                  </a:cubicBezTo>
-                  <a:lnTo>
-                    <a:pt x="51341" y="1554693"/>
-                  </a:lnTo>
-                  <a:cubicBezTo>
-                    <a:pt x="37725" y="1554693"/>
-                    <a:pt x="24666" y="1549284"/>
-                    <a:pt x="15037" y="1539655"/>
-                  </a:cubicBezTo>
-                  <a:cubicBezTo>
-                    <a:pt x="5409" y="1530027"/>
-                    <a:pt x="0" y="1516968"/>
-                    <a:pt x="0" y="1503352"/>
-                  </a:cubicBezTo>
-                  <a:lnTo>
-                    <a:pt x="0" y="51341"/>
-                  </a:lnTo>
-                  <a:cubicBezTo>
-                    <a:pt x="0" y="37725"/>
-                    <a:pt x="5409" y="24666"/>
-                    <a:pt x="15037" y="15037"/>
-                  </a:cubicBezTo>
-                  <a:cubicBezTo>
-                    <a:pt x="24666" y="5409"/>
-                    <a:pt x="37725" y="0"/>
-                    <a:pt x="51341" y="0"/>
-                  </a:cubicBezTo>
-                  <a:lnTo>
-                    <a:pt x="901826" y="0"/>
-                  </a:lnTo>
-                  <a:cubicBezTo>
-                    <a:pt x="915442" y="0"/>
-                    <a:pt x="928501" y="5409"/>
-                    <a:pt x="938130" y="15037"/>
-                  </a:cubicBezTo>
-                  <a:cubicBezTo>
-                    <a:pt x="947758" y="24666"/>
-                    <a:pt x="953167" y="37725"/>
-                    <a:pt x="953167" y="51341"/>
-                  </a:cubicBezTo>
-                  <a:close/>
-                </a:path>
-              </a:pathLst>
-            </a:custGeom>
-            <a:solidFill>
-              <a:srgbClr val="545454"/>
-            </a:solidFill>
-          </p:spPr>
-        </p:sp>
-        <p:sp>
-          <p:nvSpPr>
-            <p:cNvPr name="TextBox 4" id="4"/>
-            <p:cNvSpPr txBox="true"/>
-            <p:nvPr/>
-          </p:nvSpPr>
-          <p:spPr>
-            <a:xfrm>
-              <a:off x="0" y="-47625"/>
-              <a:ext cx="953167" cy="1602318"/>
-            </a:xfrm>
-            <a:prstGeom prst="rect">
-              <a:avLst/>
-            </a:prstGeom>
-          </p:spPr>
-          <p:txBody>
-            <a:bodyPr anchor="ctr" rtlCol="false" tIns="50800" lIns="50800" bIns="50800" rIns="50800"/>
-            <a:lstStyle/>
-            <a:p>
-              <a:pPr algn="ctr">
-                <a:lnSpc>
-                  <a:spcPts val="2659"/>
-                </a:lnSpc>
-              </a:pPr>
-            </a:p>
-          </p:txBody>
-        </p:sp>
-      </p:grpSp>
-      <p:grpSp>
-        <p:nvGrpSpPr>
-          <p:cNvPr name="Group 5" id="5"/>
-          <p:cNvGrpSpPr/>
-          <p:nvPr/>
-        </p:nvGrpSpPr>
-        <p:grpSpPr>
-          <a:xfrm rot="0">
-            <a:off x="0" y="0"/>
-            <a:ext cx="3619056" cy="1028700"/>
-            <a:chOff x="0" y="0"/>
-            <a:chExt cx="953167" cy="270878"/>
-          </a:xfrm>
-        </p:grpSpPr>
-        <p:sp>
-          <p:nvSpPr>
-            <p:cNvPr name="Freeform 6" id="6"/>
-            <p:cNvSpPr/>
-            <p:nvPr/>
-          </p:nvSpPr>
-          <p:spPr>
-            <a:xfrm flipH="false" flipV="false" rot="0">
-              <a:off x="0" y="0"/>
-              <a:ext cx="953167" cy="270878"/>
-            </a:xfrm>
-            <a:custGeom>
-              <a:avLst/>
-              <a:gdLst/>
-              <a:ahLst/>
-              <a:cxnLst/>
-              <a:rect r="r" b="b" t="t" l="l"/>
-              <a:pathLst>
-                <a:path h="270878" w="953167">
-                  <a:moveTo>
-                    <a:pt x="953167" y="51341"/>
-                  </a:moveTo>
-                  <a:lnTo>
-                    <a:pt x="953167" y="219537"/>
-                  </a:lnTo>
-                  <a:cubicBezTo>
-                    <a:pt x="953167" y="233153"/>
-                    <a:pt x="947758" y="246212"/>
-                    <a:pt x="938130" y="255840"/>
-                  </a:cubicBezTo>
-                  <a:cubicBezTo>
-                    <a:pt x="928501" y="265468"/>
-                    <a:pt x="915442" y="270878"/>
-                    <a:pt x="901826" y="270878"/>
-                  </a:cubicBezTo>
-                  <a:lnTo>
-                    <a:pt x="51341" y="270878"/>
-                  </a:lnTo>
-                  <a:cubicBezTo>
-                    <a:pt x="37725" y="270878"/>
-                    <a:pt x="24666" y="265468"/>
-                    <a:pt x="15037" y="255840"/>
-                  </a:cubicBezTo>
-                  <a:cubicBezTo>
-                    <a:pt x="5409" y="246212"/>
-                    <a:pt x="0" y="233153"/>
-                    <a:pt x="0" y="219537"/>
-                  </a:cubicBezTo>
-                  <a:lnTo>
-                    <a:pt x="0" y="51341"/>
-                  </a:lnTo>
-                  <a:cubicBezTo>
-                    <a:pt x="0" y="37725"/>
-                    <a:pt x="5409" y="24666"/>
-                    <a:pt x="15037" y="15037"/>
-                  </a:cubicBezTo>
-                  <a:cubicBezTo>
-                    <a:pt x="24666" y="5409"/>
-                    <a:pt x="37725" y="0"/>
-                    <a:pt x="51341" y="0"/>
-                  </a:cubicBezTo>
-                  <a:lnTo>
-                    <a:pt x="901826" y="0"/>
-                  </a:lnTo>
-                  <a:cubicBezTo>
-                    <a:pt x="915442" y="0"/>
-                    <a:pt x="928501" y="5409"/>
-                    <a:pt x="938130" y="15037"/>
-                  </a:cubicBezTo>
-                  <a:cubicBezTo>
-                    <a:pt x="947758" y="24666"/>
-                    <a:pt x="953167" y="37725"/>
-                    <a:pt x="953167" y="51341"/>
-                  </a:cubicBezTo>
-                  <a:close/>
-                </a:path>
-              </a:pathLst>
-            </a:custGeom>
-            <a:solidFill>
-              <a:srgbClr val="545454"/>
-            </a:solidFill>
-          </p:spPr>
-        </p:sp>
-        <p:sp>
-          <p:nvSpPr>
-            <p:cNvPr name="TextBox 7" id="7"/>
-            <p:cNvSpPr txBox="true"/>
-            <p:nvPr/>
-          </p:nvSpPr>
-          <p:spPr>
-            <a:xfrm>
-              <a:off x="0" y="-47625"/>
-              <a:ext cx="953167" cy="318503"/>
-            </a:xfrm>
-            <a:prstGeom prst="rect">
-              <a:avLst/>
-            </a:prstGeom>
-          </p:spPr>
-          <p:txBody>
-            <a:bodyPr anchor="ctr" rtlCol="false" tIns="50800" lIns="50800" bIns="50800" rIns="50800"/>
-            <a:lstStyle/>
-            <a:p>
-              <a:pPr algn="ctr">
-                <a:lnSpc>
-                  <a:spcPts val="2659"/>
-                </a:lnSpc>
-              </a:pPr>
-            </a:p>
-          </p:txBody>
-        </p:sp>
-      </p:grpSp>
-      <p:grpSp>
-        <p:nvGrpSpPr>
-          <p:cNvPr name="Group 8" id="8"/>
-          <p:cNvGrpSpPr/>
-          <p:nvPr/>
-        </p:nvGrpSpPr>
-        <p:grpSpPr>
-          <a:xfrm rot="0">
-            <a:off x="11376386" y="0"/>
-            <a:ext cx="6911614" cy="10287000"/>
-            <a:chOff x="0" y="0"/>
-            <a:chExt cx="1820343" cy="2708776"/>
-          </a:xfrm>
-        </p:grpSpPr>
-        <p:sp>
-          <p:nvSpPr>
-            <p:cNvPr name="Freeform 9" id="9"/>
-            <p:cNvSpPr/>
-            <p:nvPr/>
-          </p:nvSpPr>
-          <p:spPr>
-            <a:xfrm flipH="false" flipV="false" rot="0">
-              <a:off x="0" y="0"/>
-              <a:ext cx="1820343" cy="2708776"/>
-            </a:xfrm>
-            <a:custGeom>
-              <a:avLst/>
-              <a:gdLst/>
-              <a:ahLst/>
-              <a:cxnLst/>
-              <a:rect r="r" b="b" t="t" l="l"/>
-              <a:pathLst>
-                <a:path h="2708776" w="1820343">
-                  <a:moveTo>
-                    <a:pt x="1820343" y="26883"/>
-                  </a:moveTo>
-                  <a:lnTo>
-                    <a:pt x="1820343" y="2681892"/>
-                  </a:lnTo>
-                  <a:cubicBezTo>
-                    <a:pt x="1820343" y="2696739"/>
-                    <a:pt x="1808307" y="2708776"/>
-                    <a:pt x="1793460" y="2708776"/>
-                  </a:cubicBezTo>
-                  <a:lnTo>
-                    <a:pt x="26883" y="2708776"/>
-                  </a:lnTo>
-                  <a:cubicBezTo>
-                    <a:pt x="12036" y="2708776"/>
-                    <a:pt x="0" y="2696739"/>
-                    <a:pt x="0" y="2681892"/>
-                  </a:cubicBezTo>
-                  <a:lnTo>
-                    <a:pt x="0" y="26883"/>
-                  </a:lnTo>
-                  <a:cubicBezTo>
-                    <a:pt x="0" y="12036"/>
-                    <a:pt x="12036" y="0"/>
-                    <a:pt x="26883" y="0"/>
-                  </a:cubicBezTo>
-                  <a:lnTo>
-                    <a:pt x="1793460" y="0"/>
-                  </a:lnTo>
-                  <a:cubicBezTo>
-                    <a:pt x="1800590" y="0"/>
-                    <a:pt x="1807427" y="2832"/>
-                    <a:pt x="1812469" y="7874"/>
-                  </a:cubicBezTo>
-                  <a:cubicBezTo>
-                    <a:pt x="1817510" y="12915"/>
-                    <a:pt x="1820343" y="19753"/>
-                    <a:pt x="1820343" y="26883"/>
-                  </a:cubicBezTo>
-                  <a:close/>
-                </a:path>
-              </a:pathLst>
-            </a:custGeom>
-            <a:solidFill>
-              <a:srgbClr val="FFFFFF"/>
-            </a:solidFill>
-          </p:spPr>
-        </p:sp>
-        <p:sp>
-          <p:nvSpPr>
-            <p:cNvPr name="TextBox 10" id="10"/>
-            <p:cNvSpPr txBox="true"/>
-            <p:nvPr/>
-          </p:nvSpPr>
-          <p:spPr>
-            <a:xfrm>
-              <a:off x="0" y="-47625"/>
-              <a:ext cx="1820343" cy="2756401"/>
-            </a:xfrm>
-            <a:prstGeom prst="rect">
-              <a:avLst/>
-            </a:prstGeom>
-          </p:spPr>
-          <p:txBody>
-            <a:bodyPr anchor="ctr" rtlCol="false" tIns="50800" lIns="50800" bIns="50800" rIns="50800"/>
-            <a:lstStyle/>
-            <a:p>
-              <a:pPr algn="ctr">
-                <a:lnSpc>
-                  <a:spcPts val="2659"/>
-                </a:lnSpc>
-              </a:pPr>
-            </a:p>
-          </p:txBody>
-        </p:sp>
-      </p:grpSp>
-      <p:grpSp>
-        <p:nvGrpSpPr>
-          <p:cNvPr name="Group 11" id="11"/>
-          <p:cNvGrpSpPr/>
-          <p:nvPr/>
-        </p:nvGrpSpPr>
-        <p:grpSpPr>
-          <a:xfrm rot="0">
-            <a:off x="0" y="7241807"/>
-            <a:ext cx="11219548" cy="3045193"/>
-            <a:chOff x="0" y="0"/>
-            <a:chExt cx="2954943" cy="801861"/>
-          </a:xfrm>
-        </p:grpSpPr>
-        <p:sp>
-          <p:nvSpPr>
-            <p:cNvPr name="Freeform 12" id="12"/>
-            <p:cNvSpPr/>
-            <p:nvPr/>
-          </p:nvSpPr>
-          <p:spPr>
-            <a:xfrm flipH="false" flipV="false" rot="0">
-              <a:off x="0" y="0"/>
-              <a:ext cx="2954943" cy="801861"/>
-            </a:xfrm>
-            <a:custGeom>
-              <a:avLst/>
-              <a:gdLst/>
-              <a:ahLst/>
-              <a:cxnLst/>
-              <a:rect r="r" b="b" t="t" l="l"/>
-              <a:pathLst>
-                <a:path h="801861" w="2954943">
-                  <a:moveTo>
-                    <a:pt x="2954943" y="16561"/>
-                  </a:moveTo>
-                  <a:lnTo>
-                    <a:pt x="2954943" y="785300"/>
-                  </a:lnTo>
-                  <a:cubicBezTo>
-                    <a:pt x="2954943" y="794446"/>
-                    <a:pt x="2947528" y="801861"/>
-                    <a:pt x="2938382" y="801861"/>
-                  </a:cubicBezTo>
-                  <a:lnTo>
-                    <a:pt x="16561" y="801861"/>
-                  </a:lnTo>
-                  <a:cubicBezTo>
-                    <a:pt x="7415" y="801861"/>
-                    <a:pt x="0" y="794446"/>
-                    <a:pt x="0" y="785300"/>
-                  </a:cubicBezTo>
-                  <a:lnTo>
-                    <a:pt x="0" y="16561"/>
-                  </a:lnTo>
-                  <a:cubicBezTo>
-                    <a:pt x="0" y="7415"/>
-                    <a:pt x="7415" y="0"/>
-                    <a:pt x="16561" y="0"/>
-                  </a:cubicBezTo>
-                  <a:lnTo>
-                    <a:pt x="2938382" y="0"/>
-                  </a:lnTo>
-                  <a:cubicBezTo>
-                    <a:pt x="2947528" y="0"/>
-                    <a:pt x="2954943" y="7415"/>
-                    <a:pt x="2954943" y="16561"/>
-                  </a:cubicBezTo>
-                  <a:close/>
-                </a:path>
-              </a:pathLst>
-            </a:custGeom>
-            <a:solidFill>
-              <a:srgbClr val="FFFFFF"/>
-            </a:solidFill>
-          </p:spPr>
-        </p:sp>
-        <p:sp>
-          <p:nvSpPr>
-            <p:cNvPr name="TextBox 13" id="13"/>
-            <p:cNvSpPr txBox="true"/>
-            <p:nvPr/>
-          </p:nvSpPr>
-          <p:spPr>
-            <a:xfrm>
-              <a:off x="0" y="-47625"/>
-              <a:ext cx="2954943" cy="849486"/>
-            </a:xfrm>
-            <a:prstGeom prst="rect">
-              <a:avLst/>
-            </a:prstGeom>
-          </p:spPr>
-          <p:txBody>
-            <a:bodyPr anchor="ctr" rtlCol="false" tIns="50800" lIns="50800" bIns="50800" rIns="50800"/>
-            <a:lstStyle/>
-            <a:p>
-              <a:pPr algn="ctr">
-                <a:lnSpc>
-                  <a:spcPts val="2659"/>
-                </a:lnSpc>
-              </a:pPr>
-            </a:p>
-          </p:txBody>
-        </p:sp>
-      </p:grpSp>
-      <p:grpSp>
-        <p:nvGrpSpPr>
-          <p:cNvPr name="Group 14" id="14"/>
-          <p:cNvGrpSpPr/>
-          <p:nvPr/>
-        </p:nvGrpSpPr>
-        <p:grpSpPr>
-          <a:xfrm rot="0">
-            <a:off x="3768628" y="2580664"/>
-            <a:ext cx="7450920" cy="4508743"/>
-            <a:chOff x="0" y="0"/>
-            <a:chExt cx="1962382" cy="1187243"/>
-          </a:xfrm>
-        </p:grpSpPr>
-        <p:sp>
-          <p:nvSpPr>
-            <p:cNvPr name="Freeform 15" id="15"/>
-            <p:cNvSpPr/>
-            <p:nvPr/>
-          </p:nvSpPr>
-          <p:spPr>
-            <a:xfrm flipH="false" flipV="false" rot="0">
-              <a:off x="0" y="0"/>
-              <a:ext cx="1962382" cy="1187243"/>
-            </a:xfrm>
-            <a:custGeom>
-              <a:avLst/>
-              <a:gdLst/>
-              <a:ahLst/>
-              <a:cxnLst/>
-              <a:rect r="r" b="b" t="t" l="l"/>
-              <a:pathLst>
-                <a:path h="1187243" w="1962382">
-                  <a:moveTo>
-                    <a:pt x="1962382" y="24937"/>
-                  </a:moveTo>
-                  <a:lnTo>
-                    <a:pt x="1962382" y="1162306"/>
-                  </a:lnTo>
-                  <a:cubicBezTo>
-                    <a:pt x="1962382" y="1168920"/>
-                    <a:pt x="1959755" y="1175263"/>
-                    <a:pt x="1955078" y="1179939"/>
-                  </a:cubicBezTo>
-                  <a:cubicBezTo>
-                    <a:pt x="1950402" y="1184616"/>
-                    <a:pt x="1944059" y="1187243"/>
-                    <a:pt x="1937445" y="1187243"/>
-                  </a:cubicBezTo>
-                  <a:lnTo>
-                    <a:pt x="24937" y="1187243"/>
-                  </a:lnTo>
-                  <a:cubicBezTo>
-                    <a:pt x="18324" y="1187243"/>
-                    <a:pt x="11981" y="1184616"/>
-                    <a:pt x="7304" y="1179939"/>
-                  </a:cubicBezTo>
-                  <a:cubicBezTo>
-                    <a:pt x="2627" y="1175263"/>
-                    <a:pt x="0" y="1168920"/>
-                    <a:pt x="0" y="1162306"/>
-                  </a:cubicBezTo>
-                  <a:lnTo>
-                    <a:pt x="0" y="24937"/>
-                  </a:lnTo>
-                  <a:cubicBezTo>
-                    <a:pt x="0" y="18324"/>
-                    <a:pt x="2627" y="11981"/>
-                    <a:pt x="7304" y="7304"/>
-                  </a:cubicBezTo>
-                  <a:cubicBezTo>
-                    <a:pt x="11981" y="2627"/>
-                    <a:pt x="18324" y="0"/>
-                    <a:pt x="24937" y="0"/>
-                  </a:cubicBezTo>
-                  <a:lnTo>
-                    <a:pt x="1937445" y="0"/>
-                  </a:lnTo>
-                  <a:cubicBezTo>
-                    <a:pt x="1944059" y="0"/>
-                    <a:pt x="1950402" y="2627"/>
-                    <a:pt x="1955078" y="7304"/>
-                  </a:cubicBezTo>
-                  <a:cubicBezTo>
-                    <a:pt x="1959755" y="11981"/>
-                    <a:pt x="1962382" y="18324"/>
-                    <a:pt x="1962382" y="24937"/>
-                  </a:cubicBezTo>
-                  <a:close/>
-                </a:path>
-              </a:pathLst>
-            </a:custGeom>
-            <a:solidFill>
-              <a:srgbClr val="FFFFFF"/>
-            </a:solidFill>
-          </p:spPr>
-        </p:sp>
-        <p:sp>
-          <p:nvSpPr>
-            <p:cNvPr name="TextBox 16" id="16"/>
-            <p:cNvSpPr txBox="true"/>
-            <p:nvPr/>
-          </p:nvSpPr>
-          <p:spPr>
-            <a:xfrm>
-              <a:off x="0" y="-47625"/>
-              <a:ext cx="1962382" cy="1234868"/>
-            </a:xfrm>
-            <a:prstGeom prst="rect">
-              <a:avLst/>
-            </a:prstGeom>
-          </p:spPr>
-          <p:txBody>
-            <a:bodyPr anchor="ctr" rtlCol="false" tIns="50800" lIns="50800" bIns="50800" rIns="50800"/>
-            <a:lstStyle/>
-            <a:p>
-              <a:pPr algn="ctr">
-                <a:lnSpc>
-                  <a:spcPts val="2659"/>
-                </a:lnSpc>
-              </a:pPr>
-            </a:p>
-          </p:txBody>
-        </p:sp>
-      </p:grpSp>
     </p:spTree>
   </p:cSld>
   <p:clrMapOvr>
